--- a/deliverables/course5-monday-presentation.pptx
+++ b/deliverables/course5-monday-presentation.pptx
@@ -4562,7 +4562,7 @@
                 </a:solidFill>
                 <a:latin typeface="Microsoft YaHei"/>
               </a:rPr>
-              <a:t>当前状态：G0 本地基线通过；G1/G2 只读证据待补齐</a:t>
+              <a:t>当前状态：G0 本地基线通过；G1/G2 只读排查完成，等待课程数据入口</a:t>
             </a:r>
           </a:p>
         </p:txBody>
@@ -6171,7 +6171,7 @@
                           </a:solidFill>
                           <a:latin typeface="Microsoft YaHei"/>
                         </a:rPr>
-                        <a:t>记录搜索范围，查课程共享项目，再集中提问</a:t>
+                        <a:t>两区域排查已留证据；已向老师提交精确问题，等待回复</a:t>
                       </a:r>
                     </a:p>
                   </a:txBody>
@@ -6609,7 +6609,7 @@
                 </a:solidFill>
                 <a:latin typeface="Microsoft YaHei"/>
               </a:rPr>
-              <a:t>下一步先完成 G1/G2：DCS 数据字段与候选镜像实例证据</a:t>
+              <a:t>下一步：老师回复入口后补 G1（路径/字段/物种），再开实例补 G2</a:t>
             </a:r>
           </a:p>
           <a:p>
@@ -6863,7 +6863,7 @@
         <p:spPr>
           <a:xfrm>
             <a:off x="749808" y="1353312"/>
-            <a:ext cx="10195560" cy="3566159"/>
+            <a:ext cx="10195560" cy="4096511"/>
           </a:xfrm>
           <a:prstGeom prst="rect">
             <a:avLst/>
@@ -6948,7 +6948,7 @@
                 </a:solidFill>
                 <a:latin typeface="Microsoft YaHei"/>
               </a:rPr>
-              <a:t>已完成：47 个单元测试、合成 smoke test、预算与契约检查通过</a:t>
+              <a:t>已完成：本地基线全绿；DCS 两区域只读排查完成（课程数据 0 命中）</a:t>
             </a:r>
           </a:p>
           <a:p>
@@ -6967,7 +6967,26 @@
                 </a:solidFill>
                 <a:latin typeface="Microsoft YaHei"/>
               </a:rPr>
-              <a:t>阻塞项：DCS 数据路径、字段、实例内版本、正式 kBET 仍待只读核验</a:t>
+              <a:t>阻塞项：课程数据入口待老师回复；实例内版本与正式 kBET 待开实例核验</a:t>
+            </a:r>
+          </a:p>
+          <a:p>
+            <a:pPr>
+              <a:lnSpc>
+                <a:spcPct val="112000"/>
+              </a:lnSpc>
+              <a:spcAft>
+                <a:spcPts val="900"/>
+              </a:spcAft>
+            </a:pPr>
+            <a:r>
+              <a:rPr sz="1500">
+                <a:solidFill>
+                  <a:srgbClr val="1D2731"/>
+                </a:solidFill>
+                <a:latin typeface="Microsoft YaHei"/>
+              </a:rPr>
+              <a:t>镜像候选：SATURN--22/--21 页面同栈；平台无预置 kBET 镜像</a:t>
             </a:r>
           </a:p>
           <a:p>
@@ -9946,7 +9965,7 @@
         </p:nvSpPr>
         <p:spPr>
           <a:xfrm>
-            <a:off x="749808" y="4480560"/>
+            <a:off x="749808" y="2148840"/>
             <a:ext cx="10195560" cy="3035808"/>
           </a:xfrm>
           <a:prstGeom prst="rect">

--- a/deliverables/course5-monday-presentation.pptx
+++ b/deliverables/course5-monday-presentation.pptx
@@ -514,7 +514,7 @@
           <a:lstStyle/>
           <a:p>
             <a:r>
-              <a:t>开场说明：本次汇报的是可执行初步方案，不是工具结果排名。</a:t>
+              <a:t>开场说明：今天讲的是“怎么做”的方案，还没有实验结果；以后所有结论都会来自我们自己跑出的数据。</a:t>
             </a:r>
           </a:p>
         </p:txBody>
@@ -584,7 +584,7 @@
           <a:lstStyle/>
           <a:p>
             <a:r>
-              <a:t>4090x2 只作为单卡内存不足后的例外，需要新证据和组内批准。</a:t>
+              <a:t>完整命令清单在讲稿文档第 4 节；现场可以直接演示。</a:t>
             </a:r>
           </a:p>
         </p:txBody>
@@ -724,7 +724,7 @@
           <a:lstStyle/>
           <a:p>
             <a:r>
-              <a:t>风险应对的核心是留证据，而不是临时改参数。</a:t>
+              <a:t>每条风险都已经留了证据或写好预案。</a:t>
             </a:r>
           </a:p>
         </p:txBody>
@@ -794,7 +794,7 @@
           <a:lstStyle/>
           <a:p>
             <a:r>
-              <a:t>结尾回到老师要求：理解课题、精读文献、可执行方案和小组分工均已覆盖。</a:t>
+              <a:t>结尾回扣老师四项要求：课题理解、文献精读、可执行方案、小组分工均已覆盖。</a:t>
             </a:r>
           </a:p>
         </p:txBody>
@@ -864,7 +864,7 @@
           <a:lstStyle/>
           <a:p>
             <a:r>
-              <a:t>强调当前是准备完成，不是实验完成；pending 是安全状态。</a:t>
+              <a:t>这一页回答“进一步理解课题”：核心不是复现论文，而是做一次公平的工具比较。</a:t>
             </a:r>
           </a:p>
         </p:txBody>
@@ -934,7 +934,7 @@
           <a:lstStyle/>
           <a:p>
             <a:r>
-              <a:t>说明为什么不能直接复用论文结果：我们的任务是评测工具，不是复现一张论文图。</a:t>
+              <a:t>核心难点是“公平”和“可复现”，这决定了后面所有设计。</a:t>
             </a:r>
           </a:p>
         </p:txBody>
@@ -1004,7 +1004,7 @@
           <a:lstStyle/>
           <a:p>
             <a:r>
-              <a:t>讲述时突出 HEART 为什么适合作为主数据，以及 accession 与平台路径的区别。</a:t>
+              <a:t>口播稿见讲稿文档第 3 节，60-90 秒版本。</a:t>
             </a:r>
           </a:p>
         </p:txBody>
@@ -1074,7 +1074,7 @@
           <a:lstStyle/>
           <a:p>
             <a:r>
-              <a:t>老师已明确空间数据暂不做；LBSPA 不是被放弃，而是后置。</a:t>
+              <a:t>回应老师要求：空间数据是暂缓不是放弃，排在单细胞结论之后。</a:t>
             </a:r>
           </a:p>
         </p:txBody>
@@ -1144,7 +1144,7 @@
           <a:lstStyle/>
           <a:p>
             <a:r>
-              <a:t>物种名保持 pending，等页面证据；首轮 pilot 不做工具排名。</a:t>
+              <a:t>每一步都有检查点，上一步没通过就不进入下一步。</a:t>
             </a:r>
           </a:p>
         </p:txBody>
@@ -1214,7 +1214,7 @@
           <a:lstStyle/>
           <a:p>
             <a:r>
-              <a:t>正式结果禁止使用本地 smoke test 的 kBET 代理。</a:t>
+              <a:t>“留一物种”是评测设计的核心：避免“用同一批数据既当教练又当考题”。</a:t>
             </a:r>
           </a:p>
         </p:txBody>
@@ -1284,7 +1284,7 @@
           <a:lstStyle/>
           <a:p>
             <a:r>
-              <a:t>R0-R4 均不消耗云资源；R5 前必须通过 startup_preflight。</a:t>
+              <a:t>前三类由同一个脚本统一计算，不允许各工具用各自的算法。</a:t>
             </a:r>
           </a:p>
         </p:txBody>
@@ -1354,7 +1354,7 @@
           <a:lstStyle/>
           <a:p>
             <a:r>
-              <a:t>这一页回应老师要求：非本课题同学拿到方案也能直接开始操作。</a:t>
+              <a:t>回应“时间不用太精确”：以检查点推进，不承诺具体小时数。具体限额数字记录在讲稿文档里。</a:t>
             </a:r>
           </a:p>
         </p:txBody>
@@ -4482,7 +4482,7 @@
                 </a:solidFill>
                 <a:latin typeface="Microsoft YaHei"/>
               </a:rPr>
-              <a:t>SATURN vs SAMap vs scVI 系 | 课题5初步方案</a:t>
+              <a:t>SATURN vs SAMap vs scVI ｜ 课题5 初步方案汇报</a:t>
             </a:r>
           </a:p>
         </p:txBody>
@@ -4496,7 +4496,7 @@
         <p:spPr>
           <a:xfrm>
             <a:off x="749808" y="3429000"/>
-            <a:ext cx="10195560" cy="1975103"/>
+            <a:ext cx="10195560" cy="2359152"/>
           </a:xfrm>
           <a:prstGeom prst="rect">
             <a:avLst/>
@@ -4511,14 +4511,14 @@
           <a:p>
             <a:pPr>
               <a:lnSpc>
-                <a:spcPct val="112000"/>
+                <a:spcPct val="128000"/>
               </a:lnSpc>
               <a:spcAft>
-                <a:spcPts val="900"/>
+                <a:spcPts val="1500"/>
               </a:spcAft>
             </a:pPr>
             <a:r>
-              <a:rPr sz="1500">
+              <a:rPr sz="1700">
                 <a:solidFill>
                   <a:srgbClr val="1D2731"/>
                 </a:solidFill>
@@ -4530,39 +4530,39 @@
           <a:p>
             <a:pPr>
               <a:lnSpc>
-                <a:spcPct val="112000"/>
+                <a:spcPct val="128000"/>
               </a:lnSpc>
               <a:spcAft>
-                <a:spcPts val="900"/>
+                <a:spcPts val="1500"/>
               </a:spcAft>
             </a:pPr>
             <a:r>
-              <a:rPr sz="1500">
+              <a:rPr sz="1700">
                 <a:solidFill>
                   <a:srgbClr val="1D2731"/>
                 </a:solidFill>
                 <a:latin typeface="Microsoft YaHei"/>
               </a:rPr>
-              <a:t>课程阶段：下节课前方案汇报</a:t>
+              <a:t>本次汇报：我们打算怎么做这件事</a:t>
             </a:r>
           </a:p>
           <a:p>
             <a:pPr>
               <a:lnSpc>
-                <a:spcPct val="112000"/>
+                <a:spcPct val="128000"/>
               </a:lnSpc>
               <a:spcAft>
-                <a:spcPts val="900"/>
+                <a:spcPts val="1500"/>
               </a:spcAft>
             </a:pPr>
             <a:r>
-              <a:rPr sz="1500">
+              <a:rPr sz="1700">
                 <a:solidFill>
                   <a:srgbClr val="1D2731"/>
                 </a:solidFill>
                 <a:latin typeface="Microsoft YaHei"/>
               </a:rPr>
-              <a:t>当前状态：G0 本地基线通过；G1/G2 只读排查完成，等待课程数据入口</a:t>
+              <a:t>当前状态：方案已就绪，等课程数据入口</a:t>
             </a:r>
           </a:p>
         </p:txBody>
@@ -4745,517 +4745,209 @@
                 </a:solidFill>
                 <a:latin typeface="Microsoft YaHei"/>
               </a:rPr>
-              <a:t>启动门与预算</a:t>
-            </a:r>
-          </a:p>
-        </p:txBody>
-      </p:sp>
-      <p:graphicFrame>
-        <p:nvGraphicFramePr>
-          <p:cNvPr id="4" name="Table 3"/>
-          <p:cNvGraphicFramePr>
-            <a:graphicFrameLocks noGrp="1"/>
-          </p:cNvGraphicFramePr>
+              <a:t>外组同学怎么接手（四步就能开始）</a:t>
+            </a:r>
+          </a:p>
+        </p:txBody>
+      </p:sp>
+      <p:sp>
+        <p:nvSpPr>
+          <p:cNvPr id="4" name="Rectangle 3"/>
+          <p:cNvSpPr/>
           <p:nvPr/>
-        </p:nvGraphicFramePr>
-        <p:xfrm>
-          <a:off x="685800" y="1353312"/>
-          <a:ext cx="9966959" cy="3840480"/>
-        </p:xfrm>
-        <a:graphic>
-          <a:graphicData uri="http://schemas.openxmlformats.org/drawingml/2006/table">
-            <a:tbl>
-              <a:tblPr firstRow="1" bandRow="1">
-                <a:tableStyleId>{5C22544A-7EE6-4342-B048-85BDC9FD1C3A}</a:tableStyleId>
-              </a:tblPr>
-              <a:tblGrid>
-                <a:gridCol w="1600200"/>
-                <a:gridCol w="3977639"/>
-                <a:gridCol w="4389120"/>
-              </a:tblGrid>
-              <a:tr h="438912">
-                <a:tc>
-                  <a:txBody>
-                    <a:bodyPr wrap="square"/>
-                    <a:lstStyle/>
-                    <a:p>
-                      <a:r>
-                        <a:rPr sz="1200" b="1">
-                          <a:solidFill>
-                            <a:srgbClr val="FFFFFF"/>
-                          </a:solidFill>
-                          <a:latin typeface="Microsoft YaHei"/>
-                        </a:rPr>
-                        <a:t>控制项</a:t>
-                      </a:r>
-                    </a:p>
-                  </a:txBody>
-                  <a:tcPr marL="64008" marR="64008" marT="27432" marB="27432" anchor="ctr">
-                    <a:solidFill>
-                      <a:srgbClr val="17324D"/>
-                    </a:solidFill>
-                  </a:tcPr>
-                </a:tc>
-                <a:tc>
-                  <a:txBody>
-                    <a:bodyPr wrap="square"/>
-                    <a:lstStyle/>
-                    <a:p>
-                      <a:r>
-                        <a:rPr sz="1200" b="1">
-                          <a:solidFill>
-                            <a:srgbClr val="FFFFFF"/>
-                          </a:solidFill>
-                          <a:latin typeface="Microsoft YaHei"/>
-                        </a:rPr>
-                        <a:t>规则</a:t>
-                      </a:r>
-                    </a:p>
-                  </a:txBody>
-                  <a:tcPr marL="64008" marR="64008" marT="27432" marB="27432" anchor="ctr">
-                    <a:solidFill>
-                      <a:srgbClr val="17324D"/>
-                    </a:solidFill>
-                  </a:tcPr>
-                </a:tc>
-                <a:tc>
-                  <a:txBody>
-                    <a:bodyPr wrap="square"/>
-                    <a:lstStyle/>
-                    <a:p>
-                      <a:r>
-                        <a:rPr sz="1200" b="1">
-                          <a:solidFill>
-                            <a:srgbClr val="FFFFFF"/>
-                          </a:solidFill>
-                          <a:latin typeface="Microsoft YaHei"/>
-                        </a:rPr>
-                        <a:t>证据</a:t>
-                      </a:r>
-                    </a:p>
-                  </a:txBody>
-                  <a:tcPr marL="64008" marR="64008" marT="27432" marB="27432" anchor="ctr">
-                    <a:solidFill>
-                      <a:srgbClr val="17324D"/>
-                    </a:solidFill>
-                  </a:tcPr>
-                </a:tc>
-              </a:tr>
-              <a:tr h="566928">
-                <a:tc>
-                  <a:txBody>
-                    <a:bodyPr wrap="square"/>
-                    <a:lstStyle/>
-                    <a:p>
-                      <a:r>
-                        <a:rPr sz="1100" b="0">
-                          <a:solidFill>
-                            <a:srgbClr val="1D2731"/>
-                          </a:solidFill>
-                          <a:latin typeface="Microsoft YaHei"/>
-                        </a:rPr>
-                        <a:t>云动作</a:t>
-                      </a:r>
-                    </a:p>
-                  </a:txBody>
-                  <a:tcPr marL="64008" marR="64008" marT="27432" marB="27432" anchor="ctr">
-                    <a:solidFill>
-                      <a:srgbClr val="FFFFFF"/>
-                    </a:solidFill>
-                  </a:tcPr>
-                </a:tc>
-                <a:tc>
-                  <a:txBody>
-                    <a:bodyPr wrap="square"/>
-                    <a:lstStyle/>
-                    <a:p>
-                      <a:r>
-                        <a:rPr sz="1100" b="0">
-                          <a:solidFill>
-                            <a:srgbClr val="1D2731"/>
-                          </a:solidFill>
-                          <a:latin typeface="Microsoft YaHei"/>
-                        </a:rPr>
-                        <a:t>G3 前禁止创建/上传/安装/提交</a:t>
-                      </a:r>
-                    </a:p>
-                  </a:txBody>
-                  <a:tcPr marL="64008" marR="64008" marT="27432" marB="27432" anchor="ctr">
-                    <a:solidFill>
-                      <a:srgbClr val="FFFFFF"/>
-                    </a:solidFill>
-                  </a:tcPr>
-                </a:tc>
-                <a:tc>
-                  <a:txBody>
-                    <a:bodyPr wrap="square"/>
-                    <a:lstStyle/>
-                    <a:p>
-                      <a:r>
-                        <a:rPr sz="1100" b="0">
-                          <a:solidFill>
-                            <a:srgbClr val="1D2731"/>
-                          </a:solidFill>
-                          <a:latin typeface="Microsoft YaHei"/>
-                        </a:rPr>
-                        <a:t>startup-preflight.json</a:t>
-                      </a:r>
-                    </a:p>
-                  </a:txBody>
-                  <a:tcPr marL="64008" marR="64008" marT="27432" marB="27432" anchor="ctr">
-                    <a:solidFill>
-                      <a:srgbClr val="FFFFFF"/>
-                    </a:solidFill>
-                  </a:tcPr>
-                </a:tc>
-              </a:tr>
-              <a:tr h="566928">
-                <a:tc>
-                  <a:txBody>
-                    <a:bodyPr wrap="square"/>
-                    <a:lstStyle/>
-                    <a:p>
-                      <a:r>
-                        <a:rPr sz="1100" b="0">
-                          <a:solidFill>
-                            <a:srgbClr val="1D2731"/>
-                          </a:solidFill>
-                          <a:latin typeface="Microsoft YaHei"/>
-                        </a:rPr>
-                        <a:t>硬件</a:t>
-                      </a:r>
-                    </a:p>
-                  </a:txBody>
-                  <a:tcPr marL="64008" marR="64008" marT="27432" marB="27432" anchor="ctr">
-                    <a:solidFill>
-                      <a:srgbClr val="F2F6F8"/>
-                    </a:solidFill>
-                  </a:tcPr>
-                </a:tc>
-                <a:tc>
-                  <a:txBody>
-                    <a:bodyPr wrap="square"/>
-                    <a:lstStyle/>
-                    <a:p>
-                      <a:r>
-                        <a:rPr sz="1100" b="0">
-                          <a:solidFill>
-                            <a:srgbClr val="1D2731"/>
-                          </a:solidFill>
-                          <a:latin typeface="Microsoft YaHei"/>
-                        </a:rPr>
-                        <a:t>默认 4090x1</a:t>
-                      </a:r>
-                    </a:p>
-                  </a:txBody>
-                  <a:tcPr marL="64008" marR="64008" marT="27432" marB="27432" anchor="ctr">
-                    <a:solidFill>
-                      <a:srgbClr val="F2F6F8"/>
-                    </a:solidFill>
-                  </a:tcPr>
-                </a:tc>
-                <a:tc>
-                  <a:txBody>
-                    <a:bodyPr wrap="square"/>
-                    <a:lstStyle/>
-                    <a:p>
-                      <a:r>
-                        <a:rPr sz="1100" b="0">
-                          <a:solidFill>
-                            <a:srgbClr val="1D2731"/>
-                          </a:solidFill>
-                          <a:latin typeface="Microsoft YaHei"/>
-                        </a:rPr>
-                        <a:t>dcs-budget-plan.json</a:t>
-                      </a:r>
-                    </a:p>
-                  </a:txBody>
-                  <a:tcPr marL="64008" marR="64008" marT="27432" marB="27432" anchor="ctr">
-                    <a:solidFill>
-                      <a:srgbClr val="F2F6F8"/>
-                    </a:solidFill>
-                  </a:tcPr>
-                </a:tc>
-              </a:tr>
-              <a:tr h="566928">
-                <a:tc>
-                  <a:txBody>
-                    <a:bodyPr wrap="square"/>
-                    <a:lstStyle/>
-                    <a:p>
-                      <a:r>
-                        <a:rPr sz="1100" b="0">
-                          <a:solidFill>
-                            <a:srgbClr val="1D2731"/>
-                          </a:solidFill>
-                          <a:latin typeface="Microsoft YaHei"/>
-                        </a:rPr>
-                        <a:t>时间</a:t>
-                      </a:r>
-                    </a:p>
-                  </a:txBody>
-                  <a:tcPr marL="64008" marR="64008" marT="27432" marB="27432" anchor="ctr">
-                    <a:solidFill>
-                      <a:srgbClr val="FFFFFF"/>
-                    </a:solidFill>
-                  </a:tcPr>
-                </a:tc>
-                <a:tc>
-                  <a:txBody>
-                    <a:bodyPr wrap="square"/>
-                    <a:lstStyle/>
-                    <a:p>
-                      <a:r>
-                        <a:rPr sz="1100" b="0">
-                          <a:solidFill>
-                            <a:srgbClr val="1D2731"/>
-                          </a:solidFill>
-                          <a:latin typeface="Microsoft YaHei"/>
-                        </a:rPr>
-                        <a:t>pilot 25 分钟硬停止</a:t>
-                      </a:r>
-                    </a:p>
-                  </a:txBody>
-                  <a:tcPr marL="64008" marR="64008" marT="27432" marB="27432" anchor="ctr">
-                    <a:solidFill>
-                      <a:srgbClr val="FFFFFF"/>
-                    </a:solidFill>
-                  </a:tcPr>
-                </a:tc>
-                <a:tc>
-                  <a:txBody>
-                    <a:bodyPr wrap="square"/>
-                    <a:lstStyle/>
-                    <a:p>
-                      <a:r>
-                        <a:rPr sz="1100" b="0">
-                          <a:solidFill>
-                            <a:srgbClr val="1D2731"/>
-                          </a:solidFill>
-                          <a:latin typeface="Microsoft YaHei"/>
-                        </a:rPr>
-                        <a:t>resource_usage.json</a:t>
-                      </a:r>
-                    </a:p>
-                  </a:txBody>
-                  <a:tcPr marL="64008" marR="64008" marT="27432" marB="27432" anchor="ctr">
-                    <a:solidFill>
-                      <a:srgbClr val="FFFFFF"/>
-                    </a:solidFill>
-                  </a:tcPr>
-                </a:tc>
-              </a:tr>
-              <a:tr h="566928">
-                <a:tc>
-                  <a:txBody>
-                    <a:bodyPr wrap="square"/>
-                    <a:lstStyle/>
-                    <a:p>
-                      <a:r>
-                        <a:rPr sz="1100" b="0">
-                          <a:solidFill>
-                            <a:srgbClr val="1D2731"/>
-                          </a:solidFill>
-                          <a:latin typeface="Microsoft YaHei"/>
-                        </a:rPr>
-                        <a:t>内存</a:t>
-                      </a:r>
-                    </a:p>
-                  </a:txBody>
-                  <a:tcPr marL="64008" marR="64008" marT="27432" marB="27432" anchor="ctr">
-                    <a:solidFill>
-                      <a:srgbClr val="F2F6F8"/>
-                    </a:solidFill>
-                  </a:tcPr>
-                </a:tc>
-                <a:tc>
-                  <a:txBody>
-                    <a:bodyPr wrap="square"/>
-                    <a:lstStyle/>
-                    <a:p>
-                      <a:r>
-                        <a:rPr sz="1100" b="0">
-                          <a:solidFill>
-                            <a:srgbClr val="1D2731"/>
-                          </a:solidFill>
-                          <a:latin typeface="Microsoft YaHei"/>
-                        </a:rPr>
-                        <a:t>75 GB 峰值停止</a:t>
-                      </a:r>
-                    </a:p>
-                  </a:txBody>
-                  <a:tcPr marL="64008" marR="64008" marT="27432" marB="27432" anchor="ctr">
-                    <a:solidFill>
-                      <a:srgbClr val="F2F6F8"/>
-                    </a:solidFill>
-                  </a:tcPr>
-                </a:tc>
-                <a:tc>
-                  <a:txBody>
-                    <a:bodyPr wrap="square"/>
-                    <a:lstStyle/>
-                    <a:p>
-                      <a:r>
-                        <a:rPr sz="1100" b="0">
-                          <a:solidFill>
-                            <a:srgbClr val="1D2731"/>
-                          </a:solidFill>
-                          <a:latin typeface="Microsoft YaHei"/>
-                        </a:rPr>
-                        <a:t>resource_usage.json</a:t>
-                      </a:r>
-                    </a:p>
-                  </a:txBody>
-                  <a:tcPr marL="64008" marR="64008" marT="27432" marB="27432" anchor="ctr">
-                    <a:solidFill>
-                      <a:srgbClr val="F2F6F8"/>
-                    </a:solidFill>
-                  </a:tcPr>
-                </a:tc>
-              </a:tr>
-              <a:tr h="566928">
-                <a:tc>
-                  <a:txBody>
-                    <a:bodyPr wrap="square"/>
-                    <a:lstStyle/>
-                    <a:p>
-                      <a:r>
-                        <a:rPr sz="1100" b="0">
-                          <a:solidFill>
-                            <a:srgbClr val="1D2731"/>
-                          </a:solidFill>
-                          <a:latin typeface="Microsoft YaHei"/>
-                        </a:rPr>
-                        <a:t>成本</a:t>
-                      </a:r>
-                    </a:p>
-                  </a:txBody>
-                  <a:tcPr marL="64008" marR="64008" marT="27432" marB="27432" anchor="ctr">
-                    <a:solidFill>
-                      <a:srgbClr val="FFFFFF"/>
-                    </a:solidFill>
-                  </a:tcPr>
-                </a:tc>
-                <a:tc>
-                  <a:txBody>
-                    <a:bodyPr wrap="square"/>
-                    <a:lstStyle/>
-                    <a:p>
-                      <a:r>
-                        <a:rPr sz="1100" b="0">
-                          <a:solidFill>
-                            <a:srgbClr val="1D2731"/>
-                          </a:solidFill>
-                          <a:latin typeface="Microsoft YaHei"/>
-                        </a:rPr>
-                        <a:t>单次 ¥10 上限</a:t>
-                      </a:r>
-                    </a:p>
-                  </a:txBody>
-                  <a:tcPr marL="64008" marR="64008" marT="27432" marB="27432" anchor="ctr">
-                    <a:solidFill>
-                      <a:srgbClr val="FFFFFF"/>
-                    </a:solidFill>
-                  </a:tcPr>
-                </a:tc>
-                <a:tc>
-                  <a:txBody>
-                    <a:bodyPr wrap="square"/>
-                    <a:lstStyle/>
-                    <a:p>
-                      <a:r>
-                        <a:rPr sz="1100" b="0">
-                          <a:solidFill>
-                            <a:srgbClr val="1D2731"/>
-                          </a:solidFill>
-                          <a:latin typeface="Microsoft YaHei"/>
-                        </a:rPr>
-                        <a:t>budget_check.py 输出</a:t>
-                      </a:r>
-                    </a:p>
-                  </a:txBody>
-                  <a:tcPr marL="64008" marR="64008" marT="27432" marB="27432" anchor="ctr">
-                    <a:solidFill>
-                      <a:srgbClr val="FFFFFF"/>
-                    </a:solidFill>
-                  </a:tcPr>
-                </a:tc>
-              </a:tr>
-              <a:tr h="566928">
-                <a:tc>
-                  <a:txBody>
-                    <a:bodyPr wrap="square"/>
-                    <a:lstStyle/>
-                    <a:p>
-                      <a:r>
-                        <a:rPr sz="1100" b="0">
-                          <a:solidFill>
-                            <a:srgbClr val="1D2731"/>
-                          </a:solidFill>
-                          <a:latin typeface="Microsoft YaHei"/>
-                        </a:rPr>
-                        <a:t>实例</a:t>
-                      </a:r>
-                    </a:p>
-                  </a:txBody>
-                  <a:tcPr marL="64008" marR="64008" marT="27432" marB="27432" anchor="ctr">
-                    <a:solidFill>
-                      <a:srgbClr val="F2F6F8"/>
-                    </a:solidFill>
-                  </a:tcPr>
-                </a:tc>
-                <a:tc>
-                  <a:txBody>
-                    <a:bodyPr wrap="square"/>
-                    <a:lstStyle/>
-                    <a:p>
-                      <a:r>
-                        <a:rPr sz="1100" b="0">
-                          <a:solidFill>
-                            <a:srgbClr val="1D2731"/>
-                          </a:solidFill>
-                          <a:latin typeface="Microsoft YaHei"/>
-                        </a:rPr>
-                        <a:t>任务结束立即停止</a:t>
-                      </a:r>
-                    </a:p>
-                  </a:txBody>
-                  <a:tcPr marL="64008" marR="64008" marT="27432" marB="27432" anchor="ctr">
-                    <a:solidFill>
-                      <a:srgbClr val="F2F6F8"/>
-                    </a:solidFill>
-                  </a:tcPr>
-                </a:tc>
-                <a:tc>
-                  <a:txBody>
-                    <a:bodyPr wrap="square"/>
-                    <a:lstStyle/>
-                    <a:p>
-                      <a:r>
-                        <a:rPr sz="1100" b="0">
-                          <a:solidFill>
-                            <a:srgbClr val="1D2731"/>
-                          </a:solidFill>
-                          <a:latin typeface="Microsoft YaHei"/>
-                        </a:rPr>
-                        <a:t>运行台账</a:t>
-                      </a:r>
-                    </a:p>
-                  </a:txBody>
-                  <a:tcPr marL="64008" marR="64008" marT="27432" marB="27432" anchor="ctr">
-                    <a:solidFill>
-                      <a:srgbClr val="F2F6F8"/>
-                    </a:solidFill>
-                  </a:tcPr>
-                </a:tc>
-              </a:tr>
-            </a:tbl>
-          </a:graphicData>
-        </a:graphic>
-      </p:graphicFrame>
+        </p:nvSpPr>
+        <p:spPr>
+          <a:xfrm>
+            <a:off x="0" y="5193792"/>
+            <a:ext cx="12191695" cy="914400"/>
+          </a:xfrm>
+          <a:prstGeom prst="rect">
+            <a:avLst/>
+          </a:prstGeom>
+          <a:solidFill>
+            <a:srgbClr val="F2F6F8"/>
+          </a:solidFill>
+          <a:ln>
+            <a:noFill/>
+          </a:ln>
+        </p:spPr>
+        <p:style>
+          <a:lnRef idx="1">
+            <a:schemeClr val="accent1"/>
+          </a:lnRef>
+          <a:fillRef idx="3">
+            <a:schemeClr val="accent1"/>
+          </a:fillRef>
+          <a:effectRef idx="2">
+            <a:schemeClr val="accent1"/>
+          </a:effectRef>
+          <a:fontRef idx="minor">
+            <a:schemeClr val="lt1"/>
+          </a:fontRef>
+        </p:style>
+        <p:txBody>
+          <a:bodyPr rtlCol="0" anchor="ctr"/>
+          <a:lstStyle/>
+          <a:p>
+            <a:pPr algn="ctr"/>
+          </a:p>
+        </p:txBody>
+      </p:sp>
       <p:sp>
         <p:nvSpPr>
           <p:cNvPr id="5" name="TextBox 4"/>
+          <p:cNvSpPr txBox="1"/>
+          <p:nvPr/>
+        </p:nvSpPr>
+        <p:spPr>
+          <a:xfrm>
+            <a:off x="749808" y="5321808"/>
+            <a:ext cx="10698480" cy="658368"/>
+          </a:xfrm>
+          <a:prstGeom prst="rect">
+            <a:avLst/>
+          </a:prstGeom>
+          <a:noFill/>
+        </p:spPr>
+        <p:txBody>
+          <a:bodyPr wrap="square">
+            <a:spAutoFit/>
+          </a:bodyPr>
+          <a:lstStyle/>
+          <a:p>
+            <a:r>
+              <a:rPr sz="1500" b="1">
+                <a:solidFill>
+                  <a:srgbClr val="17324D"/>
+                </a:solidFill>
+                <a:latin typeface="Microsoft YaHei"/>
+              </a:rPr>
+              <a:t>要点：四条命令就能开始；命令逐条有解释，无需任何背景知识。</a:t>
+            </a:r>
+          </a:p>
+        </p:txBody>
+      </p:sp>
+      <p:sp>
+        <p:nvSpPr>
+          <p:cNvPr id="6" name="TextBox 5"/>
+          <p:cNvSpPr txBox="1"/>
+          <p:nvPr/>
+        </p:nvSpPr>
+        <p:spPr>
+          <a:xfrm>
+            <a:off x="749808" y="1600200"/>
+            <a:ext cx="10195560" cy="3675887"/>
+          </a:xfrm>
+          <a:prstGeom prst="rect">
+            <a:avLst/>
+          </a:prstGeom>
+          <a:noFill/>
+        </p:spPr>
+        <p:txBody>
+          <a:bodyPr wrap="square" lIns="36576" rIns="36576">
+            <a:spAutoFit/>
+          </a:bodyPr>
+          <a:lstStyle/>
+          <a:p>
+            <a:pPr>
+              <a:lnSpc>
+                <a:spcPct val="128000"/>
+              </a:lnSpc>
+              <a:spcAft>
+                <a:spcPts val="1500"/>
+              </a:spcAft>
+            </a:pPr>
+            <a:r>
+              <a:rPr sz="1500">
+                <a:solidFill>
+                  <a:srgbClr val="1D2731"/>
+                </a:solidFill>
+                <a:latin typeface="Microsoft YaHei"/>
+              </a:rPr>
+              <a:t>1. 克隆仓库并装依赖：git clone + pip install -r requirements.txt</a:t>
+            </a:r>
+          </a:p>
+          <a:p>
+            <a:pPr>
+              <a:lnSpc>
+                <a:spcPct val="128000"/>
+              </a:lnSpc>
+              <a:spcAft>
+                <a:spcPts val="1500"/>
+              </a:spcAft>
+            </a:pPr>
+            <a:r>
+              <a:rPr sz="1500">
+                <a:solidFill>
+                  <a:srgbClr val="1D2731"/>
+                </a:solidFill>
+                <a:latin typeface="Microsoft YaHei"/>
+              </a:rPr>
+              <a:t>2. 跑测试确认环境正常：python -m unittest discover -s tests -v</a:t>
+            </a:r>
+          </a:p>
+          <a:p>
+            <a:pPr>
+              <a:lnSpc>
+                <a:spcPct val="128000"/>
+              </a:lnSpc>
+              <a:spcAft>
+                <a:spcPts val="1500"/>
+              </a:spcAft>
+            </a:pPr>
+            <a:r>
+              <a:rPr sz="1500">
+                <a:solidFill>
+                  <a:srgbClr val="1D2731"/>
+                </a:solidFill>
+                <a:latin typeface="Microsoft YaHei"/>
+              </a:rPr>
+              <a:t>3. 跑一遍示例流程，熟悉输出长什么样：python scripts/smoke_test.py --outdir smoke-output</a:t>
+            </a:r>
+          </a:p>
+          <a:p>
+            <a:pPr>
+              <a:lnSpc>
+                <a:spcPct val="128000"/>
+              </a:lnSpc>
+              <a:spcAft>
+                <a:spcPts val="1500"/>
+              </a:spcAft>
+            </a:pPr>
+            <a:r>
+              <a:rPr sz="1500">
+                <a:solidFill>
+                  <a:srgbClr val="1D2731"/>
+                </a:solidFill>
+                <a:latin typeface="Microsoft YaHei"/>
+              </a:rPr>
+              <a:t>4. 按仓库里的检查清单（docs/minimal-verification-runbook.md）逐条做核对</a:t>
+            </a:r>
+          </a:p>
+          <a:p>
+            <a:pPr>
+              <a:lnSpc>
+                <a:spcPct val="128000"/>
+              </a:lnSpc>
+              <a:spcAft>
+                <a:spcPts val="1500"/>
+              </a:spcAft>
+            </a:pPr>
+            <a:r>
+              <a:rPr sz="1700">
+                <a:solidFill>
+                  <a:srgbClr val="1D2731"/>
+                </a:solidFill>
+                <a:latin typeface="Microsoft YaHei"/>
+              </a:rPr>
+              <a:t>每条命令的作用都写在文档里，不需要追问任何“隐藏背景”就能开始</a:t>
+            </a:r>
+          </a:p>
+        </p:txBody>
+      </p:sp>
+      <p:sp>
+        <p:nvSpPr>
+          <p:cNvPr id="7" name="TextBox 6"/>
           <p:cNvSpPr txBox="1"/>
           <p:nvPr/>
         </p:nvSpPr>
@@ -5293,7 +4985,7 @@
       </p:sp>
       <p:sp>
         <p:nvSpPr>
-          <p:cNvPr id="6" name="TextBox 5"/>
+          <p:cNvPr id="8" name="TextBox 7"/>
           <p:cNvSpPr txBox="1"/>
           <p:nvPr/>
         </p:nvSpPr>
@@ -5431,7 +5123,7 @@
                 </a:solidFill>
                 <a:latin typeface="Microsoft YaHei"/>
               </a:rPr>
-              <a:t>分工与交叉复核</a:t>
+              <a:t>分工与互相检查</a:t>
             </a:r>
           </a:p>
         </p:txBody>
@@ -5517,7 +5209,7 @@
                           </a:solidFill>
                           <a:latin typeface="Microsoft YaHei"/>
                         </a:rPr>
-                        <a:t>当前小交付</a:t>
+                        <a:t>具体负责</a:t>
                       </a:r>
                     </a:p>
                   </a:txBody>
@@ -5539,7 +5231,7 @@
                           </a:solidFill>
                           <a:latin typeface="Microsoft YaHei"/>
                         </a:rPr>
-                        <a:t>复核人</a:t>
+                        <a:t>交叉检查</a:t>
                       </a:r>
                     </a:p>
                   </a:txBody>
@@ -5585,7 +5277,7 @@
                           </a:solidFill>
                           <a:latin typeface="Microsoft YaHei"/>
                         </a:rPr>
-                        <a:t>A 数据与生物学</a:t>
+                        <a:t>找数据</a:t>
                       </a:r>
                     </a:p>
                   </a:txBody>
@@ -5607,7 +5299,7 @@
                           </a:solidFill>
                           <a:latin typeface="Microsoft YaHei"/>
                         </a:rPr>
-                        <a:t>路径、字段、物种、标签、同源基因</a:t>
+                        <a:t>确认数据路径、物种、标签字段能读、含义清楚</a:t>
                       </a:r>
                     </a:p>
                   </a:txBody>
@@ -5675,7 +5367,7 @@
                           </a:solidFill>
                           <a:latin typeface="Microsoft YaHei"/>
                         </a:rPr>
-                        <a:t>B 环境与算力</a:t>
+                        <a:t>管软件和算力</a:t>
                       </a:r>
                     </a:p>
                   </a:txBody>
@@ -5697,7 +5389,7 @@
                           </a:solidFill>
                           <a:latin typeface="Microsoft YaHei"/>
                         </a:rPr>
-                        <a:t>镜像、版本、GPU、预算、停止规则</a:t>
+                        <a:t>核对软件版本，控制时长和费用，记录每次运行环境</a:t>
                       </a:r>
                     </a:p>
                   </a:txBody>
@@ -5765,7 +5457,7 @@
                           </a:solidFill>
                           <a:latin typeface="Microsoft YaHei"/>
                         </a:rPr>
-                        <a:t>C 评测与报告</a:t>
+                        <a:t>管评分和报告</a:t>
                       </a:r>
                     </a:p>
                   </a:txBody>
@@ -5787,7 +5479,7 @@
                           </a:solidFill>
                           <a:latin typeface="Microsoft YaHei"/>
                         </a:rPr>
-                        <a:t>指标、留一物种、artifact、报告</a:t>
+                        <a:t>统一评分脚本，整理结果表，写报告</a:t>
                       </a:r>
                     </a:p>
                   </a:txBody>
@@ -5833,7 +5525,7 @@
         <p:spPr>
           <a:xfrm>
             <a:off x="749808" y="4526280"/>
-            <a:ext cx="10195560" cy="1444751"/>
+            <a:ext cx="10195560" cy="1700784"/>
           </a:xfrm>
           <a:prstGeom prst="rect">
             <a:avLst/>
@@ -5848,39 +5540,39 @@
           <a:p>
             <a:pPr>
               <a:lnSpc>
-                <a:spcPct val="112000"/>
+                <a:spcPct val="128000"/>
               </a:lnSpc>
               <a:spcAft>
-                <a:spcPts val="900"/>
+                <a:spcPts val="1500"/>
               </a:spcAft>
             </a:pPr>
             <a:r>
-              <a:rPr sz="1500">
+              <a:rPr sz="1700">
                 <a:solidFill>
                   <a:srgbClr val="1D2731"/>
                 </a:solidFill>
                 <a:latin typeface="Microsoft YaHei"/>
               </a:rPr>
-              <a:t>主线可轮换；主责是推进人，不是审批人</a:t>
+              <a:t>主线可以轮换；每个人都要复核别人的一块交付</a:t>
             </a:r>
           </a:p>
           <a:p>
             <a:pPr>
               <a:lnSpc>
-                <a:spcPct val="112000"/>
+                <a:spcPct val="128000"/>
               </a:lnSpc>
               <a:spcAft>
-                <a:spcPts val="900"/>
+                <a:spcPts val="1500"/>
               </a:spcAft>
             </a:pPr>
             <a:r>
-              <a:rPr sz="1500">
+              <a:rPr sz="1700">
                 <a:solidFill>
                   <a:srgbClr val="1D2731"/>
                 </a:solidFill>
                 <a:latin typeface="Microsoft YaHei"/>
               </a:rPr>
-              <a:t>每次 PR 写清：改了什么、输入、验证方式、是否触碰 DCS</a:t>
+              <a:t>一条硬规矩：开机花钱的操作，必须全组同意后才执行</a:t>
             </a:r>
           </a:p>
         </p:txBody>
@@ -6063,7 +5755,7 @@
                 </a:solidFill>
                 <a:latin typeface="Microsoft YaHei"/>
               </a:rPr>
-              <a:t>风险与应对</a:t>
+              <a:t>可能遇到的问题与对策</a:t>
             </a:r>
           </a:p>
         </p:txBody>
@@ -6078,7 +5770,7 @@
         </p:nvGraphicFramePr>
         <p:xfrm>
           <a:off x="685800" y="1353312"/>
-          <a:ext cx="9966960" cy="3273552"/>
+          <a:ext cx="9966960" cy="2706624"/>
         </p:xfrm>
         <a:graphic>
           <a:graphicData uri="http://schemas.openxmlformats.org/drawingml/2006/table">
@@ -6103,7 +5795,7 @@
                           </a:solidFill>
                           <a:latin typeface="Microsoft YaHei"/>
                         </a:rPr>
-                        <a:t>风险</a:t>
+                        <a:t>可能的问题</a:t>
                       </a:r>
                     </a:p>
                   </a:txBody>
@@ -6125,7 +5817,7 @@
                           </a:solidFill>
                           <a:latin typeface="Microsoft YaHei"/>
                         </a:rPr>
-                        <a:t>应对</a:t>
+                        <a:t>我们的对策</a:t>
                       </a:r>
                     </a:p>
                   </a:txBody>
@@ -6149,7 +5841,7 @@
                           </a:solidFill>
                           <a:latin typeface="Microsoft YaHei"/>
                         </a:rPr>
-                        <a:t>DCS 数据入口缺失</a:t>
+                        <a:t>课程数据还没拿到</a:t>
                       </a:r>
                     </a:p>
                   </a:txBody>
@@ -6171,7 +5863,7 @@
                           </a:solidFill>
                           <a:latin typeface="Microsoft YaHei"/>
                         </a:rPr>
-                        <a:t>两区域排查已留证据；已向老师提交精确问题，等待回复</a:t>
+                        <a:t>已在平台全面排查并精确提问老师；回复前不花一分钱</a:t>
                       </a:r>
                     </a:p>
                   </a:txBody>
@@ -6195,7 +5887,7 @@
                           </a:solidFill>
                           <a:latin typeface="Microsoft YaHei"/>
                         </a:rPr>
-                        <a:t>镜像版本冲突</a:t>
+                        <a:t>软件环境对不上</a:t>
                       </a:r>
                     </a:p>
                   </a:txBody>
@@ -6217,7 +5909,7 @@
                           </a:solidFill>
                           <a:latin typeface="Microsoft YaHei"/>
                         </a:rPr>
-                        <a:t>实例内只读 import/which/version，不按页面猜</a:t>
+                        <a:t>进容器核对版本；缺工具只写安装方案，不偷偷装</a:t>
                       </a:r>
                     </a:p>
                   </a:txBody>
@@ -6241,7 +5933,7 @@
                           </a:solidFill>
                           <a:latin typeface="Microsoft YaHei"/>
                         </a:rPr>
-                        <a:t>OOM 或超时</a:t>
+                        <a:t>试跑爆内存或超时</a:t>
                       </a:r>
                     </a:p>
                   </a:txBody>
@@ -6263,7 +5955,7 @@
                           </a:solidFill>
                           <a:latin typeface="Microsoft YaHei"/>
                         </a:rPr>
-                        <a:t>保存失败 artifact，缩小物种/细胞/时间</a:t>
+                        <a:t>保存现场和日志，缩小数据规模再试，不加钱加卡</a:t>
                       </a:r>
                     </a:p>
                   </a:txBody>
@@ -6287,7 +5979,7 @@
                           </a:solidFill>
                           <a:latin typeface="Microsoft YaHei"/>
                         </a:rPr>
-                        <a:t>指标不可比</a:t>
+                        <a:t>结果不可比</a:t>
                       </a:r>
                     </a:p>
                   </a:txBody>
@@ -6309,59 +6001,13 @@
                           </a:solidFill>
                           <a:latin typeface="Microsoft YaHei"/>
                         </a:rPr>
-                        <a:t>统一输入、拆分、种子、版本和资源记录</a:t>
+                        <a:t>输入、种子、版本全部提前写死并存档</a:t>
                       </a:r>
                     </a:p>
                   </a:txBody>
                   <a:tcPr marL="64008" marR="64008" marT="27432" marB="27432" anchor="ctr">
                     <a:solidFill>
                       <a:srgbClr val="F2F6F8"/>
-                    </a:solidFill>
-                  </a:tcPr>
-                </a:tc>
-              </a:tr>
-              <a:tr h="566928">
-                <a:tc>
-                  <a:txBody>
-                    <a:bodyPr wrap="square"/>
-                    <a:lstStyle/>
-                    <a:p>
-                      <a:r>
-                        <a:rPr sz="1100" b="0">
-                          <a:solidFill>
-                            <a:srgbClr val="1D2731"/>
-                          </a:solidFill>
-                          <a:latin typeface="Microsoft YaHei"/>
-                        </a:rPr>
-                        <a:t>把论文结果当结论</a:t>
-                      </a:r>
-                    </a:p>
-                  </a:txBody>
-                  <a:tcPr marL="64008" marR="64008" marT="27432" marB="27432" anchor="ctr">
-                    <a:solidFill>
-                      <a:srgbClr val="FFFFFF"/>
-                    </a:solidFill>
-                  </a:tcPr>
-                </a:tc>
-                <a:tc>
-                  <a:txBody>
-                    <a:bodyPr wrap="square"/>
-                    <a:lstStyle/>
-                    <a:p>
-                      <a:r>
-                        <a:rPr sz="1100" b="0">
-                          <a:solidFill>
-                            <a:srgbClr val="1D2731"/>
-                          </a:solidFill>
-                          <a:latin typeface="Microsoft YaHei"/>
-                        </a:rPr>
-                        <a:t>结论只引用本组运行 artifact</a:t>
-                      </a:r>
-                    </a:p>
-                  </a:txBody>
-                  <a:tcPr marL="64008" marR="64008" marT="27432" marB="27432" anchor="ctr">
-                    <a:solidFill>
-                      <a:srgbClr val="FFFFFF"/>
                     </a:solidFill>
                   </a:tcPr>
                 </a:tc>
@@ -6548,21 +6194,64 @@
                 </a:solidFill>
                 <a:latin typeface="Microsoft YaHei"/>
               </a:rPr>
-              <a:t>结论与下一步</a:t>
-            </a:r>
-          </a:p>
-        </p:txBody>
-      </p:sp>
-      <p:sp>
-        <p:nvSpPr>
-          <p:cNvPr id="4" name="TextBox 3"/>
+              <a:t>总结</a:t>
+            </a:r>
+          </a:p>
+        </p:txBody>
+      </p:sp>
+      <p:sp>
+        <p:nvSpPr>
+          <p:cNvPr id="4" name="Rectangle 3"/>
+          <p:cNvSpPr/>
+          <p:nvPr/>
+        </p:nvSpPr>
+        <p:spPr>
+          <a:xfrm>
+            <a:off x="0" y="5193792"/>
+            <a:ext cx="12191695" cy="914400"/>
+          </a:xfrm>
+          <a:prstGeom prst="rect">
+            <a:avLst/>
+          </a:prstGeom>
+          <a:solidFill>
+            <a:srgbClr val="F2F6F8"/>
+          </a:solidFill>
+          <a:ln>
+            <a:noFill/>
+          </a:ln>
+        </p:spPr>
+        <p:style>
+          <a:lnRef idx="1">
+            <a:schemeClr val="accent1"/>
+          </a:lnRef>
+          <a:fillRef idx="3">
+            <a:schemeClr val="accent1"/>
+          </a:fillRef>
+          <a:effectRef idx="2">
+            <a:schemeClr val="accent1"/>
+          </a:effectRef>
+          <a:fontRef idx="minor">
+            <a:schemeClr val="lt1"/>
+          </a:fontRef>
+        </p:style>
+        <p:txBody>
+          <a:bodyPr rtlCol="0" anchor="ctr"/>
+          <a:lstStyle/>
+          <a:p>
+            <a:pPr algn="ctr"/>
+          </a:p>
+        </p:txBody>
+      </p:sp>
+      <p:sp>
+        <p:nvSpPr>
+          <p:cNvPr id="5" name="TextBox 4"/>
           <p:cNvSpPr txBox="1"/>
           <p:nvPr/>
         </p:nvSpPr>
         <p:spPr>
           <a:xfrm>
-            <a:off x="749808" y="1353312"/>
-            <a:ext cx="10195560" cy="3035808"/>
+            <a:off x="749808" y="5321808"/>
+            <a:ext cx="10698480" cy="658368"/>
           </a:xfrm>
           <a:prstGeom prst="rect">
             <a:avLst/>
@@ -6570,6 +6259,40 @@
           <a:noFill/>
         </p:spPr>
         <p:txBody>
+          <a:bodyPr wrap="square">
+            <a:spAutoFit/>
+          </a:bodyPr>
+          <a:lstStyle/>
+          <a:p>
+            <a:r>
+              <a:rPr sz="1500" b="1">
+                <a:solidFill>
+                  <a:srgbClr val="17324D"/>
+                </a:solidFill>
+                <a:latin typeface="Microsoft YaHei"/>
+              </a:rPr>
+              <a:t>要点：方案就绪，等数据入口；花钱之前全组同意。</a:t>
+            </a:r>
+          </a:p>
+        </p:txBody>
+      </p:sp>
+      <p:sp>
+        <p:nvSpPr>
+          <p:cNvPr id="6" name="TextBox 5"/>
+          <p:cNvSpPr txBox="1"/>
+          <p:nvPr/>
+        </p:nvSpPr>
+        <p:spPr>
+          <a:xfrm>
+            <a:off x="749808" y="1600200"/>
+            <a:ext cx="10195560" cy="3675887"/>
+          </a:xfrm>
+          <a:prstGeom prst="rect">
+            <a:avLst/>
+          </a:prstGeom>
+          <a:noFill/>
+        </p:spPr>
+        <p:txBody>
           <a:bodyPr wrap="square" lIns="36576" rIns="36576">
             <a:spAutoFit/>
           </a:bodyPr>
@@ -6577,103 +6300,103 @@
           <a:p>
             <a:pPr>
               <a:lnSpc>
-                <a:spcPct val="112000"/>
+                <a:spcPct val="128000"/>
               </a:lnSpc>
               <a:spcAft>
-                <a:spcPts val="900"/>
+                <a:spcPts val="1500"/>
               </a:spcAft>
             </a:pPr>
             <a:r>
-              <a:rPr sz="1500">
+              <a:rPr sz="1700">
                 <a:solidFill>
                   <a:srgbClr val="1D2731"/>
                 </a:solidFill>
                 <a:latin typeface="Microsoft YaHei"/>
               </a:rPr>
-              <a:t>方案已达到可交接标准：数据、方法、指标、预算、分工和停止线明确</a:t>
+              <a:t>方案已完整：数据、方法、评分、分工、费用上限全部明确</a:t>
             </a:r>
           </a:p>
           <a:p>
             <a:pPr>
               <a:lnSpc>
-                <a:spcPct val="112000"/>
+                <a:spcPct val="128000"/>
               </a:lnSpc>
               <a:spcAft>
-                <a:spcPts val="900"/>
+                <a:spcPts val="1500"/>
               </a:spcAft>
             </a:pPr>
             <a:r>
-              <a:rPr sz="1500">
+              <a:rPr sz="1700">
                 <a:solidFill>
                   <a:srgbClr val="1D2731"/>
                 </a:solidFill>
                 <a:latin typeface="Microsoft YaHei"/>
               </a:rPr>
-              <a:t>下一步：老师回复入口后补 G1（路径/字段/物种），再开实例补 G2</a:t>
+              <a:t>已完成：本地流程全部跑通；数据平台已排查两轮，问题已汇总给老师</a:t>
             </a:r>
           </a:p>
           <a:p>
             <a:pPr>
               <a:lnSpc>
-                <a:spcPct val="112000"/>
+                <a:spcPct val="128000"/>
               </a:lnSpc>
               <a:spcAft>
-                <a:spcPts val="900"/>
+                <a:spcPts val="1500"/>
               </a:spcAft>
             </a:pPr>
             <a:r>
-              <a:rPr sz="1500">
+              <a:rPr sz="1700">
                 <a:solidFill>
                   <a:srgbClr val="1D2731"/>
                 </a:solidFill>
                 <a:latin typeface="Microsoft YaHei"/>
               </a:rPr>
-              <a:t>G1/G2 通过后提交启动门审查，申请 4090x1 最小 pilot</a:t>
+              <a:t>等待中：课程数据入口——老师回复后即可进入试跑准备</a:t>
             </a:r>
           </a:p>
           <a:p>
             <a:pPr>
               <a:lnSpc>
-                <a:spcPct val="112000"/>
+                <a:spcPct val="128000"/>
               </a:lnSpc>
               <a:spcAft>
-                <a:spcPts val="900"/>
+                <a:spcPts val="1500"/>
               </a:spcAft>
             </a:pPr>
             <a:r>
-              <a:rPr sz="1500">
+              <a:rPr sz="1700">
                 <a:solidFill>
                   <a:srgbClr val="1D2731"/>
                 </a:solidFill>
                 <a:latin typeface="Microsoft YaHei"/>
               </a:rPr>
-              <a:t>pilot 只验证流程；正式排名留给近缘/远缘/混合场景</a:t>
+              <a:t>纪律：开机花钱前必须全组同意，跑完立即关机</a:t>
             </a:r>
           </a:p>
           <a:p>
             <a:pPr>
               <a:lnSpc>
-                <a:spcPct val="112000"/>
+                <a:spcPct val="128000"/>
               </a:lnSpc>
               <a:spcAft>
-                <a:spcPts val="900"/>
+                <a:spcPts val="1500"/>
               </a:spcAft>
             </a:pPr>
             <a:r>
-              <a:rPr sz="1500">
+              <a:rPr sz="1700">
                 <a:solidFill>
                   <a:srgbClr val="1D2731"/>
                 </a:solidFill>
                 <a:latin typeface="Microsoft YaHei"/>
               </a:rPr>
-              <a:t>最终交付基准报告、场景化选型指南和 Word 结题报告</a:t>
-            </a:r>
-          </a:p>
-        </p:txBody>
-      </p:sp>
-      <p:sp>
-        <p:nvSpPr>
-          <p:cNvPr id="5" name="TextBox 4"/>
+              <a:t>谢谢大家，欢迎提问</a:t>
+            </a:r>
+          </a:p>
+        </p:txBody>
+      </p:sp>
+      <p:sp>
+        <p:nvSpPr>
+          <p:cNvPr id="7" name="TextBox 6"/>
           <p:cNvSpPr txBox="1"/>
           <p:nvPr/>
         </p:nvSpPr>
@@ -6711,7 +6434,7 @@
       </p:sp>
       <p:sp>
         <p:nvSpPr>
-          <p:cNvPr id="6" name="TextBox 5"/>
+          <p:cNvPr id="8" name="TextBox 7"/>
           <p:cNvSpPr txBox="1"/>
           <p:nvPr/>
         </p:nvSpPr>
@@ -6849,21 +6572,64 @@
                 </a:solidFill>
                 <a:latin typeface="Microsoft YaHei"/>
               </a:rPr>
-              <a:t>一页结论</a:t>
-            </a:r>
-          </a:p>
-        </p:txBody>
-      </p:sp>
-      <p:sp>
-        <p:nvSpPr>
-          <p:cNvPr id="4" name="TextBox 3"/>
+              <a:t>我们要回答的问题</a:t>
+            </a:r>
+          </a:p>
+        </p:txBody>
+      </p:sp>
+      <p:sp>
+        <p:nvSpPr>
+          <p:cNvPr id="4" name="Rectangle 3"/>
+          <p:cNvSpPr/>
+          <p:nvPr/>
+        </p:nvSpPr>
+        <p:spPr>
+          <a:xfrm>
+            <a:off x="0" y="5193792"/>
+            <a:ext cx="12191695" cy="914400"/>
+          </a:xfrm>
+          <a:prstGeom prst="rect">
+            <a:avLst/>
+          </a:prstGeom>
+          <a:solidFill>
+            <a:srgbClr val="F2F6F8"/>
+          </a:solidFill>
+          <a:ln>
+            <a:noFill/>
+          </a:ln>
+        </p:spPr>
+        <p:style>
+          <a:lnRef idx="1">
+            <a:schemeClr val="accent1"/>
+          </a:lnRef>
+          <a:fillRef idx="3">
+            <a:schemeClr val="accent1"/>
+          </a:fillRef>
+          <a:effectRef idx="2">
+            <a:schemeClr val="accent1"/>
+          </a:effectRef>
+          <a:fontRef idx="minor">
+            <a:schemeClr val="lt1"/>
+          </a:fontRef>
+        </p:style>
+        <p:txBody>
+          <a:bodyPr rtlCol="0" anchor="ctr"/>
+          <a:lstStyle/>
+          <a:p>
+            <a:pPr algn="ctr"/>
+          </a:p>
+        </p:txBody>
+      </p:sp>
+      <p:sp>
+        <p:nvSpPr>
+          <p:cNvPr id="5" name="TextBox 4"/>
           <p:cNvSpPr txBox="1"/>
           <p:nvPr/>
         </p:nvSpPr>
         <p:spPr>
           <a:xfrm>
-            <a:off x="749808" y="1353312"/>
-            <a:ext cx="10195560" cy="4096511"/>
+            <a:off x="749808" y="5321808"/>
+            <a:ext cx="10698480" cy="658368"/>
           </a:xfrm>
           <a:prstGeom prst="rect">
             <a:avLst/>
@@ -6871,6 +6637,40 @@
           <a:noFill/>
         </p:spPr>
         <p:txBody>
+          <a:bodyPr wrap="square">
+            <a:spAutoFit/>
+          </a:bodyPr>
+          <a:lstStyle/>
+          <a:p>
+            <a:r>
+              <a:rPr sz="1500" b="1">
+                <a:solidFill>
+                  <a:srgbClr val="17324D"/>
+                </a:solidFill>
+                <a:latin typeface="Microsoft YaHei"/>
+              </a:rPr>
+              <a:t>要点：公平比较是课题的核心——同样的数据、同样的规则，只比工具本身。</a:t>
+            </a:r>
+          </a:p>
+        </p:txBody>
+      </p:sp>
+      <p:sp>
+        <p:nvSpPr>
+          <p:cNvPr id="6" name="TextBox 5"/>
+          <p:cNvSpPr txBox="1"/>
+          <p:nvPr/>
+        </p:nvSpPr>
+        <p:spPr>
+          <a:xfrm>
+            <a:off x="749808" y="1600200"/>
+            <a:ext cx="10195560" cy="3017520"/>
+          </a:xfrm>
+          <a:prstGeom prst="rect">
+            <a:avLst/>
+          </a:prstGeom>
+          <a:noFill/>
+        </p:spPr>
+        <p:txBody>
           <a:bodyPr wrap="square" lIns="36576" rIns="36576">
             <a:spAutoFit/>
           </a:bodyPr>
@@ -6878,29 +6678,29 @@
           <a:p>
             <a:pPr>
               <a:lnSpc>
-                <a:spcPct val="112000"/>
+                <a:spcPct val="128000"/>
               </a:lnSpc>
               <a:spcAft>
-                <a:spcPts val="900"/>
+                <a:spcPts val="1500"/>
               </a:spcAft>
             </a:pPr>
             <a:r>
-              <a:rPr sz="1500">
+              <a:rPr sz="1700">
                 <a:solidFill>
                   <a:srgbClr val="1D2731"/>
                 </a:solidFill>
                 <a:latin typeface="Microsoft YaHei"/>
               </a:rPr>
-              <a:t>目标：做可审计的跨物种单细胞整合基准评测</a:t>
+              <a:t>背景：三个工具都能把不同物种的细胞“对齐”后比较，但各论文各用各的，没有公平对比</a:t>
             </a:r>
           </a:p>
           <a:p>
             <a:pPr>
               <a:lnSpc>
-                <a:spcPct val="112000"/>
+                <a:spcPct val="128000"/>
               </a:lnSpc>
               <a:spcAft>
-                <a:spcPts val="900"/>
+                <a:spcPts val="1500"/>
               </a:spcAft>
             </a:pPr>
             <a:r>
@@ -6910,109 +6710,52 @@
                 </a:solidFill>
                 <a:latin typeface="Microsoft YaHei"/>
               </a:rPr>
-              <a:t>路径：HEART 2-3 物种先打通流程，再扩展近缘/远缘/混合场景</a:t>
+              <a:t>我们的课题：同一批数据、同一套规则，让 SATURN、SAMap、scVI 各跑一遍，按统一标准打分</a:t>
             </a:r>
           </a:p>
           <a:p>
             <a:pPr>
               <a:lnSpc>
-                <a:spcPct val="112000"/>
+                <a:spcPct val="128000"/>
               </a:lnSpc>
               <a:spcAft>
-                <a:spcPts val="900"/>
+                <a:spcPts val="1500"/>
               </a:spcAft>
             </a:pPr>
             <a:r>
-              <a:rPr sz="1500">
+              <a:rPr sz="1700">
                 <a:solidFill>
                   <a:srgbClr val="1D2731"/>
                 </a:solidFill>
                 <a:latin typeface="Microsoft YaHei"/>
               </a:rPr>
-              <a:t>后置：LBSPA 七鳃鳗-小鼠 snRNA 只做单细胞主结论后的补充</a:t>
+              <a:t>产出：一张公平的对比表，告诉后来者“什么场景该用哪个工具”</a:t>
             </a:r>
           </a:p>
           <a:p>
             <a:pPr>
               <a:lnSpc>
-                <a:spcPct val="112000"/>
+                <a:spcPct val="128000"/>
               </a:lnSpc>
               <a:spcAft>
-                <a:spcPts val="900"/>
+                <a:spcPts val="1500"/>
               </a:spcAft>
             </a:pPr>
             <a:r>
-              <a:rPr sz="1500">
+              <a:rPr sz="1700">
                 <a:solidFill>
                   <a:srgbClr val="1D2731"/>
                 </a:solidFill>
                 <a:latin typeface="Microsoft YaHei"/>
               </a:rPr>
-              <a:t>已完成：本地基线全绿；DCS 两区域只读排查完成（课程数据 0 命中）</a:t>
-            </a:r>
-          </a:p>
-          <a:p>
-            <a:pPr>
-              <a:lnSpc>
-                <a:spcPct val="112000"/>
-              </a:lnSpc>
-              <a:spcAft>
-                <a:spcPts val="900"/>
-              </a:spcAft>
-            </a:pPr>
-            <a:r>
-              <a:rPr sz="1500">
-                <a:solidFill>
-                  <a:srgbClr val="1D2731"/>
-                </a:solidFill>
-                <a:latin typeface="Microsoft YaHei"/>
-              </a:rPr>
-              <a:t>阻塞项：课程数据入口待老师回复；实例内版本与正式 kBET 待开实例核验</a:t>
-            </a:r>
-          </a:p>
-          <a:p>
-            <a:pPr>
-              <a:lnSpc>
-                <a:spcPct val="112000"/>
-              </a:lnSpc>
-              <a:spcAft>
-                <a:spcPts val="900"/>
-              </a:spcAft>
-            </a:pPr>
-            <a:r>
-              <a:rPr sz="1500">
-                <a:solidFill>
-                  <a:srgbClr val="1D2731"/>
-                </a:solidFill>
-                <a:latin typeface="Microsoft YaHei"/>
-              </a:rPr>
-              <a:t>镜像候选：SATURN--22/--21 页面同栈；平台无预置 kBET 镜像</a:t>
-            </a:r>
-          </a:p>
-          <a:p>
-            <a:pPr>
-              <a:lnSpc>
-                <a:spcPct val="112000"/>
-              </a:lnSpc>
-              <a:spcAft>
-                <a:spcPts val="900"/>
-              </a:spcAft>
-            </a:pPr>
-            <a:r>
-              <a:rPr sz="1500">
-                <a:solidFill>
-                  <a:srgbClr val="1D2731"/>
-                </a:solidFill>
-                <a:latin typeface="Microsoft YaHei"/>
-              </a:rPr>
-              <a:t>纪律：启动门未通过前，不创建实例、不上传数据、不安装包、不提交任务</a:t>
-            </a:r>
-          </a:p>
-        </p:txBody>
-      </p:sp>
-      <p:sp>
-        <p:nvSpPr>
-          <p:cNvPr id="5" name="TextBox 4"/>
+              <a:t>原则：只认我们自己跑出来的数，论文数值和示例数据只能当参考</a:t>
+            </a:r>
+          </a:p>
+        </p:txBody>
+      </p:sp>
+      <p:sp>
+        <p:nvSpPr>
+          <p:cNvPr id="7" name="TextBox 6"/>
           <p:cNvSpPr txBox="1"/>
           <p:nvPr/>
         </p:nvSpPr>
@@ -7050,7 +6793,7 @@
       </p:sp>
       <p:sp>
         <p:nvSpPr>
-          <p:cNvPr id="6" name="TextBox 5"/>
+          <p:cNvPr id="8" name="TextBox 7"/>
           <p:cNvSpPr txBox="1"/>
           <p:nvPr/>
         </p:nvSpPr>
@@ -7188,7 +6931,7 @@
                 </a:solidFill>
                 <a:latin typeface="Microsoft YaHei"/>
               </a:rPr>
-              <a:t>课题理解：四层拆解</a:t>
+              <a:t>课题的四个关键点</a:t>
             </a:r>
           </a:p>
         </p:txBody>
@@ -7229,7 +6972,7 @@
                           </a:solidFill>
                           <a:latin typeface="Microsoft YaHei"/>
                         </a:rPr>
-                        <a:t>层次</a:t>
+                        <a:t>要回答的问题</a:t>
                       </a:r>
                     </a:p>
                   </a:txBody>
@@ -7251,7 +6994,7 @@
                           </a:solidFill>
                           <a:latin typeface="Microsoft YaHei"/>
                         </a:rPr>
-                        <a:t>核心问题</a:t>
+                        <a:t>关键点</a:t>
                       </a:r>
                     </a:p>
                   </a:txBody>
@@ -7273,7 +7016,7 @@
                           </a:solidFill>
                           <a:latin typeface="Microsoft YaHei"/>
                         </a:rPr>
-                        <a:t>当前设计</a:t>
+                        <a:t>我们的做法</a:t>
                       </a:r>
                     </a:p>
                   </a:txBody>
@@ -7297,7 +7040,7 @@
                           </a:solidFill>
                           <a:latin typeface="Microsoft YaHei"/>
                         </a:rPr>
-                        <a:t>数据</a:t>
+                        <a:t>用什么数据</a:t>
                       </a:r>
                     </a:p>
                   </a:txBody>
@@ -7319,7 +7062,7 @@
                           </a:solidFill>
                           <a:latin typeface="Microsoft YaHei"/>
                         </a:rPr>
-                        <a:t>用哪些物种、细胞和标签</a:t>
+                        <a:t>跨物种单细胞数据，带细胞类型标签</a:t>
                       </a:r>
                     </a:p>
                   </a:txBody>
@@ -7341,7 +7084,7 @@
                           </a:solidFill>
                           <a:latin typeface="Microsoft YaHei"/>
                         </a:rPr>
-                        <a:t>HEART pilot；后续覆盖近缘、远缘、混合</a:t>
+                        <a:t>用课程提供的 HEART 心脏图谱，先拿 2-3 个物种</a:t>
                       </a:r>
                     </a:p>
                   </a:txBody>
@@ -7365,7 +7108,7 @@
                           </a:solidFill>
                           <a:latin typeface="Microsoft YaHei"/>
                         </a:rPr>
-                        <a:t>方法</a:t>
+                        <a:t>怎么算公平</a:t>
                       </a:r>
                     </a:p>
                   </a:txBody>
@@ -7387,7 +7130,7 @@
                           </a:solidFill>
                           <a:latin typeface="Microsoft YaHei"/>
                         </a:rPr>
-                        <a:t>如何公平比较</a:t>
+                        <a:t>三个工具吃同样的输入、同样的规则</a:t>
                       </a:r>
                     </a:p>
                   </a:txBody>
@@ -7409,7 +7152,7 @@
                           </a:solidFill>
                           <a:latin typeface="Microsoft YaHei"/>
                         </a:rPr>
-                        <a:t>相同输入、拆分、同源规则、随机种子</a:t>
+                        <a:t>统一细胞、基因、拆分方式和随机种子</a:t>
                       </a:r>
                     </a:p>
                   </a:txBody>
@@ -7433,7 +7176,7 @@
                           </a:solidFill>
                           <a:latin typeface="Microsoft YaHei"/>
                         </a:rPr>
-                        <a:t>评价</a:t>
+                        <a:t>怎么算好</a:t>
                       </a:r>
                     </a:p>
                   </a:txBody>
@@ -7455,7 +7198,7 @@
                           </a:solidFill>
                           <a:latin typeface="Microsoft YaHei"/>
                         </a:rPr>
-                        <a:t>什么算好</a:t>
+                        <a:t>既要把物种混匀，也要保住细胞类型差异</a:t>
                       </a:r>
                     </a:p>
                   </a:txBody>
@@ -7477,7 +7220,7 @@
                           </a:solidFill>
                           <a:latin typeface="Microsoft YaHei"/>
                         </a:rPr>
-                        <a:t>macro-F1、kBET、iLISI、silhouette、资源</a:t>
+                        <a:t>三个工具用同一组指标打分</a:t>
                       </a:r>
                     </a:p>
                   </a:txBody>
@@ -7501,7 +7244,7 @@
                           </a:solidFill>
                           <a:latin typeface="Microsoft YaHei"/>
                         </a:rPr>
-                        <a:t>复现</a:t>
+                        <a:t>别人能否照做</a:t>
                       </a:r>
                     </a:p>
                   </a:txBody>
@@ -7523,7 +7266,7 @@
                           </a:solidFill>
                           <a:latin typeface="Microsoft YaHei"/>
                         </a:rPr>
-                        <a:t>别人能否接手</a:t>
+                        <a:t>换个人也能跑出同样的结果</a:t>
                       </a:r>
                     </a:p>
                   </a:txBody>
@@ -7545,7 +7288,7 @@
                           </a:solidFill>
                           <a:latin typeface="Microsoft YaHei"/>
                         </a:rPr>
-                        <a:t>manifest、参数、版本、日志、指标、资源文件</a:t>
+                        <a:t>每步的输入、参数、结果都存档在仓库里</a:t>
                       </a:r>
                     </a:p>
                   </a:txBody>
@@ -7738,21 +7481,64 @@
                 </a:solidFill>
                 <a:latin typeface="Microsoft YaHei"/>
               </a:rPr>
-              <a:t>文献精读：HEART</a:t>
-            </a:r>
-          </a:p>
-        </p:txBody>
-      </p:sp>
-      <p:sp>
-        <p:nvSpPr>
-          <p:cNvPr id="4" name="TextBox 3"/>
+              <a:t>文献精读 ①：HEART 心脏跨物种图谱</a:t>
+            </a:r>
+          </a:p>
+        </p:txBody>
+      </p:sp>
+      <p:sp>
+        <p:nvSpPr>
+          <p:cNvPr id="4" name="Rectangle 3"/>
+          <p:cNvSpPr/>
+          <p:nvPr/>
+        </p:nvSpPr>
+        <p:spPr>
+          <a:xfrm>
+            <a:off x="0" y="5193792"/>
+            <a:ext cx="12191695" cy="914400"/>
+          </a:xfrm>
+          <a:prstGeom prst="rect">
+            <a:avLst/>
+          </a:prstGeom>
+          <a:solidFill>
+            <a:srgbClr val="F2F6F8"/>
+          </a:solidFill>
+          <a:ln>
+            <a:noFill/>
+          </a:ln>
+        </p:spPr>
+        <p:style>
+          <a:lnRef idx="1">
+            <a:schemeClr val="accent1"/>
+          </a:lnRef>
+          <a:fillRef idx="3">
+            <a:schemeClr val="accent1"/>
+          </a:fillRef>
+          <a:effectRef idx="2">
+            <a:schemeClr val="accent1"/>
+          </a:effectRef>
+          <a:fontRef idx="minor">
+            <a:schemeClr val="lt1"/>
+          </a:fontRef>
+        </p:style>
+        <p:txBody>
+          <a:bodyPr rtlCol="0" anchor="ctr"/>
+          <a:lstStyle/>
+          <a:p>
+            <a:pPr algn="ctr"/>
+          </a:p>
+        </p:txBody>
+      </p:sp>
+      <p:sp>
+        <p:nvSpPr>
+          <p:cNvPr id="5" name="TextBox 4"/>
           <p:cNvSpPr txBox="1"/>
           <p:nvPr/>
         </p:nvSpPr>
         <p:spPr>
           <a:xfrm>
-            <a:off x="749808" y="1353312"/>
-            <a:ext cx="10195560" cy="3566159"/>
+            <a:off x="749808" y="5321808"/>
+            <a:ext cx="10698480" cy="658368"/>
           </a:xfrm>
           <a:prstGeom prst="rect">
             <a:avLst/>
@@ -7760,6 +7546,40 @@
           <a:noFill/>
         </p:spPr>
         <p:txBody>
+          <a:bodyPr wrap="square">
+            <a:spAutoFit/>
+          </a:bodyPr>
+          <a:lstStyle/>
+          <a:p>
+            <a:r>
+              <a:rPr sz="1500" b="1">
+                <a:solidFill>
+                  <a:srgbClr val="17324D"/>
+                </a:solidFill>
+                <a:latin typeface="Microsoft YaHei"/>
+              </a:rPr>
+              <a:t>要点：HEART 提供数据和“标准答案”；论文数字是作者的结果，不是我们的。</a:t>
+            </a:r>
+          </a:p>
+        </p:txBody>
+      </p:sp>
+      <p:sp>
+        <p:nvSpPr>
+          <p:cNvPr id="6" name="TextBox 5"/>
+          <p:cNvSpPr txBox="1"/>
+          <p:nvPr/>
+        </p:nvSpPr>
+        <p:spPr>
+          <a:xfrm>
+            <a:off x="749808" y="1600200"/>
+            <a:ext cx="10195560" cy="3675887"/>
+          </a:xfrm>
+          <a:prstGeom prst="rect">
+            <a:avLst/>
+          </a:prstGeom>
+          <a:noFill/>
+        </p:spPr>
+        <p:txBody>
           <a:bodyPr wrap="square" lIns="36576" rIns="36576">
             <a:spAutoFit/>
           </a:bodyPr>
@@ -7767,122 +7587,103 @@
           <a:p>
             <a:pPr>
               <a:lnSpc>
-                <a:spcPct val="112000"/>
+                <a:spcPct val="128000"/>
               </a:lnSpc>
               <a:spcAft>
-                <a:spcPts val="900"/>
+                <a:spcPts val="1500"/>
               </a:spcAft>
             </a:pPr>
             <a:r>
-              <a:rPr sz="1500">
+              <a:rPr sz="1700">
                 <a:solidFill>
                   <a:srgbClr val="1D2731"/>
                 </a:solidFill>
                 <a:latin typeface="Microsoft YaHei"/>
               </a:rPr>
-              <a:t>论文：Science，DOI 10.1126/science.adw0855</a:t>
+              <a:t>发表在 Science：构建了动物心脏的跨物种单细胞图谱</a:t>
             </a:r>
           </a:p>
           <a:p>
             <a:pPr>
               <a:lnSpc>
-                <a:spcPct val="112000"/>
+                <a:spcPct val="128000"/>
               </a:lnSpc>
               <a:spcAft>
-                <a:spcPts val="900"/>
+                <a:spcPts val="1500"/>
               </a:spcAft>
             </a:pPr>
             <a:r>
-              <a:rPr sz="1500">
+              <a:rPr sz="1700">
                 <a:solidFill>
                   <a:srgbClr val="1D2731"/>
                 </a:solidFill>
                 <a:latin typeface="Microsoft YaHei"/>
               </a:rPr>
-              <a:t>27 个物种多组学；scRNA-seq 14 物种、399,483 细胞</a:t>
+              <a:t>规模：27 个物种；其中 16 个物种、约 48 万个细胞做了整合分析</a:t>
             </a:r>
           </a:p>
           <a:p>
             <a:pPr>
               <a:lnSpc>
-                <a:spcPct val="112000"/>
+                <a:spcPct val="128000"/>
               </a:lnSpc>
               <a:spcAft>
-                <a:spcPts val="900"/>
+                <a:spcPts val="1500"/>
               </a:spcAft>
             </a:pPr>
             <a:r>
-              <a:rPr sz="1500">
+              <a:rPr sz="1700">
                 <a:solidFill>
                   <a:srgbClr val="1D2731"/>
                 </a:solidFill>
                 <a:latin typeface="Microsoft YaHei"/>
               </a:rPr>
-              <a:t>保守性分析：SATURN 整合 16 物种、479,483 细胞；SAMap 做映射</a:t>
+              <a:t>论文做法：用 SATURN 整合物种，用 SAMap 找跨物种对应的细胞类型</a:t>
             </a:r>
           </a:p>
           <a:p>
             <a:pPr>
               <a:lnSpc>
-                <a:spcPct val="112000"/>
+                <a:spcPct val="128000"/>
               </a:lnSpc>
               <a:spcAft>
-                <a:spcPts val="900"/>
+                <a:spcPts val="1500"/>
               </a:spcAft>
             </a:pPr>
             <a:r>
-              <a:rPr sz="1500">
+              <a:rPr sz="1700">
                 <a:solidFill>
                   <a:srgbClr val="1D2731"/>
                 </a:solidFill>
                 <a:latin typeface="Microsoft YaHei"/>
               </a:rPr>
-              <a:t>关键设置：ESM2B 蛋白嵌入、2,000 macrogenes、8,000 HVGs</a:t>
+              <a:t>关键设置：蛋白质序列嵌入（ESM2B）+ 2000 个宏基因 + 8000 个高变基因</a:t>
             </a:r>
           </a:p>
           <a:p>
             <a:pPr>
               <a:lnSpc>
-                <a:spcPct val="112000"/>
+                <a:spcPct val="128000"/>
               </a:lnSpc>
               <a:spcAft>
-                <a:spcPts val="900"/>
+                <a:spcPts val="1500"/>
               </a:spcAft>
             </a:pPr>
             <a:r>
-              <a:rPr sz="1500">
+              <a:rPr sz="1700">
                 <a:solidFill>
                   <a:srgbClr val="1D2731"/>
                 </a:solidFill>
                 <a:latin typeface="Microsoft YaHei"/>
               </a:rPr>
-              <a:t>数据线索：CNGB CNP0006537；accession 不是 DCS 挂载路径</a:t>
-            </a:r>
-          </a:p>
-          <a:p>
-            <a:pPr>
-              <a:lnSpc>
-                <a:spcPct val="112000"/>
-              </a:lnSpc>
-              <a:spcAft>
-                <a:spcPts val="900"/>
-              </a:spcAft>
-            </a:pPr>
-            <a:r>
-              <a:rPr sz="1500">
-                <a:solidFill>
-                  <a:srgbClr val="1D2731"/>
-                </a:solidFill>
-                <a:latin typeface="Microsoft YaHei"/>
-              </a:rPr>
-              <a:t>对本课题：提供标签和物种范围，但不能替代小组统一评测</a:t>
-            </a:r>
-          </a:p>
-        </p:txBody>
-      </p:sp>
-      <p:sp>
-        <p:nvSpPr>
-          <p:cNvPr id="5" name="TextBox 4"/>
+              <a:t>对我们的用处：提供数据来源和标签金标准；但论文结果不能当成我们的结论</a:t>
+            </a:r>
+          </a:p>
+        </p:txBody>
+      </p:sp>
+      <p:sp>
+        <p:nvSpPr>
+          <p:cNvPr id="7" name="TextBox 6"/>
           <p:cNvSpPr txBox="1"/>
           <p:nvPr/>
         </p:nvSpPr>
@@ -7920,7 +7721,7 @@
       </p:sp>
       <p:sp>
         <p:nvSpPr>
-          <p:cNvPr id="6" name="TextBox 5"/>
+          <p:cNvPr id="8" name="TextBox 7"/>
           <p:cNvSpPr txBox="1"/>
           <p:nvPr/>
         </p:nvSpPr>
@@ -8058,21 +7859,64 @@
                 </a:solidFill>
                 <a:latin typeface="Microsoft YaHei"/>
               </a:rPr>
-              <a:t>文献精读：LBSPA</a:t>
-            </a:r>
-          </a:p>
-        </p:txBody>
-      </p:sp>
-      <p:sp>
-        <p:nvSpPr>
-          <p:cNvPr id="4" name="TextBox 3"/>
+              <a:t>文献精读 ②：LBSPA 七鳃鳗脑图谱</a:t>
+            </a:r>
+          </a:p>
+        </p:txBody>
+      </p:sp>
+      <p:sp>
+        <p:nvSpPr>
+          <p:cNvPr id="4" name="Rectangle 3"/>
+          <p:cNvSpPr/>
+          <p:nvPr/>
+        </p:nvSpPr>
+        <p:spPr>
+          <a:xfrm>
+            <a:off x="0" y="5193792"/>
+            <a:ext cx="12191695" cy="914400"/>
+          </a:xfrm>
+          <a:prstGeom prst="rect">
+            <a:avLst/>
+          </a:prstGeom>
+          <a:solidFill>
+            <a:srgbClr val="F2F6F8"/>
+          </a:solidFill>
+          <a:ln>
+            <a:noFill/>
+          </a:ln>
+        </p:spPr>
+        <p:style>
+          <a:lnRef idx="1">
+            <a:schemeClr val="accent1"/>
+          </a:lnRef>
+          <a:fillRef idx="3">
+            <a:schemeClr val="accent1"/>
+          </a:fillRef>
+          <a:effectRef idx="2">
+            <a:schemeClr val="accent1"/>
+          </a:effectRef>
+          <a:fontRef idx="minor">
+            <a:schemeClr val="lt1"/>
+          </a:fontRef>
+        </p:style>
+        <p:txBody>
+          <a:bodyPr rtlCol="0" anchor="ctr"/>
+          <a:lstStyle/>
+          <a:p>
+            <a:pPr algn="ctr"/>
+          </a:p>
+        </p:txBody>
+      </p:sp>
+      <p:sp>
+        <p:nvSpPr>
+          <p:cNvPr id="5" name="TextBox 4"/>
           <p:cNvSpPr txBox="1"/>
           <p:nvPr/>
         </p:nvSpPr>
         <p:spPr>
           <a:xfrm>
-            <a:off x="749808" y="1353312"/>
-            <a:ext cx="10195560" cy="3566159"/>
+            <a:off x="749808" y="5321808"/>
+            <a:ext cx="10698480" cy="658368"/>
           </a:xfrm>
           <a:prstGeom prst="rect">
             <a:avLst/>
@@ -8080,6 +7924,40 @@
           <a:noFill/>
         </p:spPr>
         <p:txBody>
+          <a:bodyPr wrap="square">
+            <a:spAutoFit/>
+          </a:bodyPr>
+          <a:lstStyle/>
+          <a:p>
+            <a:r>
+              <a:rPr sz="1500" b="1">
+                <a:solidFill>
+                  <a:srgbClr val="17324D"/>
+                </a:solidFill>
+                <a:latin typeface="Microsoft YaHei"/>
+              </a:rPr>
+              <a:t>要点：LBSPA 用在最后——单细胞结论出来后，换个物种跨度再验证一次。</a:t>
+            </a:r>
+          </a:p>
+        </p:txBody>
+      </p:sp>
+      <p:sp>
+        <p:nvSpPr>
+          <p:cNvPr id="6" name="TextBox 5"/>
+          <p:cNvSpPr txBox="1"/>
+          <p:nvPr/>
+        </p:nvSpPr>
+        <p:spPr>
+          <a:xfrm>
+            <a:off x="749808" y="1600200"/>
+            <a:ext cx="10195560" cy="3675887"/>
+          </a:xfrm>
+          <a:prstGeom prst="rect">
+            <a:avLst/>
+          </a:prstGeom>
+          <a:noFill/>
+        </p:spPr>
+        <p:txBody>
           <a:bodyPr wrap="square" lIns="36576" rIns="36576">
             <a:spAutoFit/>
           </a:bodyPr>
@@ -8087,122 +7965,103 @@
           <a:p>
             <a:pPr>
               <a:lnSpc>
-                <a:spcPct val="112000"/>
+                <a:spcPct val="128000"/>
               </a:lnSpc>
               <a:spcAft>
-                <a:spcPts val="900"/>
+                <a:spcPts val="1500"/>
               </a:spcAft>
             </a:pPr>
             <a:r>
-              <a:rPr sz="1500">
+              <a:rPr sz="1700">
                 <a:solidFill>
                   <a:srgbClr val="1D2731"/>
                 </a:solidFill>
                 <a:latin typeface="Microsoft YaHei"/>
               </a:rPr>
-              <a:t>论文：Science，DOI 10.1126/science.aea2535</a:t>
+              <a:t>发表在 Science：七鳃鳗全脑图谱，同时有空间数据和单核数据</a:t>
             </a:r>
           </a:p>
           <a:p>
             <a:pPr>
               <a:lnSpc>
-                <a:spcPct val="112000"/>
+                <a:spcPct val="128000"/>
               </a:lnSpc>
               <a:spcAft>
-                <a:spcPts val="900"/>
+                <a:spcPts val="1500"/>
               </a:spcAft>
             </a:pPr>
             <a:r>
-              <a:rPr sz="1500">
+              <a:rPr sz="1700">
                 <a:solidFill>
                   <a:srgbClr val="1D2731"/>
                 </a:solidFill>
                 <a:latin typeface="Microsoft YaHei"/>
               </a:rPr>
-              <a:t>七鳃鳗全脑 Stereo-seq：465,778 空间细胞、约 200 万估计细胞</a:t>
+              <a:t>我们只用单核部分：约 4.2 万个高质量细胞核、209 种细胞簇</a:t>
             </a:r>
           </a:p>
           <a:p>
             <a:pPr>
               <a:lnSpc>
-                <a:spcPct val="112000"/>
+                <a:spcPct val="128000"/>
               </a:lnSpc>
               <a:spcAft>
-                <a:spcPts val="900"/>
+                <a:spcPts val="1500"/>
               </a:spcAft>
             </a:pPr>
             <a:r>
-              <a:rPr sz="1500">
+              <a:rPr sz="1700">
                 <a:solidFill>
                   <a:srgbClr val="1D2731"/>
                 </a:solidFill>
                 <a:latin typeface="Microsoft YaHei"/>
               </a:rPr>
-              <a:t>单核数据：41,678 个高质量 snRNA、209 个细胞簇</a:t>
+              <a:t>论文做过七鳃鳗-小鼠比较：约 6900 个一对一同源基因 + scVI</a:t>
             </a:r>
           </a:p>
           <a:p>
             <a:pPr>
               <a:lnSpc>
-                <a:spcPct val="112000"/>
+                <a:spcPct val="128000"/>
               </a:lnSpc>
               <a:spcAft>
-                <a:spcPts val="900"/>
+                <a:spcPts val="1500"/>
               </a:spcAft>
             </a:pPr>
             <a:r>
-              <a:rPr sz="1500">
+              <a:rPr sz="1700">
                 <a:solidFill>
                   <a:srgbClr val="1D2731"/>
                 </a:solidFill>
                 <a:latin typeface="Microsoft YaHei"/>
               </a:rPr>
-              <a:t>七鳃鳗-小鼠比较：6,930 个一对一同源基因；scVI + Harmony</a:t>
+              <a:t>对我们的用处：单细胞实验做完后，用它做“换个物种跨度再试一次”的补充验证</a:t>
             </a:r>
           </a:p>
           <a:p>
             <a:pPr>
               <a:lnSpc>
-                <a:spcPct val="112000"/>
+                <a:spcPct val="128000"/>
               </a:lnSpc>
               <a:spcAft>
-                <a:spcPts val="900"/>
+                <a:spcPts val="1500"/>
               </a:spcAft>
             </a:pPr>
             <a:r>
-              <a:rPr sz="1500">
+              <a:rPr sz="1700">
                 <a:solidFill>
                   <a:srgbClr val="1D2731"/>
                 </a:solidFill>
                 <a:latin typeface="Microsoft YaHei"/>
               </a:rPr>
-              <a:t>对本课题：snRNA 作为跨门类后置补充；空间数据暂不进入主实验</a:t>
-            </a:r>
-          </a:p>
-          <a:p>
-            <a:pPr>
-              <a:lnSpc>
-                <a:spcPct val="112000"/>
-              </a:lnSpc>
-              <a:spcAft>
-                <a:spcPts val="900"/>
-              </a:spcAft>
-            </a:pPr>
-            <a:r>
-              <a:rPr sz="1500">
-                <a:solidFill>
-                  <a:srgbClr val="1D2731"/>
-                </a:solidFill>
-                <a:latin typeface="Microsoft YaHei"/>
-              </a:rPr>
-              <a:t>理由：避免同时混淆物种距离、模态差异和标签体系差异</a:t>
-            </a:r>
-          </a:p>
-        </p:txBody>
-      </p:sp>
-      <p:sp>
-        <p:nvSpPr>
-          <p:cNvPr id="5" name="TextBox 4"/>
+              <a:t>空间数据暂不进主实验：数据模态不同，混在一起说不清是谁的影响</a:t>
+            </a:r>
+          </a:p>
+        </p:txBody>
+      </p:sp>
+      <p:sp>
+        <p:nvSpPr>
+          <p:cNvPr id="7" name="TextBox 6"/>
           <p:cNvSpPr txBox="1"/>
           <p:nvPr/>
         </p:nvSpPr>
@@ -8240,7 +8099,7 @@
       </p:sp>
       <p:sp>
         <p:nvSpPr>
-          <p:cNvPr id="6" name="TextBox 5"/>
+          <p:cNvPr id="8" name="TextBox 7"/>
           <p:cNvSpPr txBox="1"/>
           <p:nvPr/>
         </p:nvSpPr>
@@ -8378,449 +8237,574 @@
                 </a:solidFill>
                 <a:latin typeface="Microsoft YaHei"/>
               </a:rPr>
-              <a:t>数据与场景设计</a:t>
-            </a:r>
-          </a:p>
-        </p:txBody>
-      </p:sp>
-      <p:graphicFrame>
-        <p:nvGraphicFramePr>
-          <p:cNvPr id="4" name="Table 3"/>
-          <p:cNvGraphicFramePr>
-            <a:graphicFrameLocks noGrp="1"/>
-          </p:cNvGraphicFramePr>
+              <a:t>实验总体思路</a:t>
+            </a:r>
+          </a:p>
+        </p:txBody>
+      </p:sp>
+      <p:sp>
+        <p:nvSpPr>
+          <p:cNvPr id="4" name="Rounded Rectangle 3"/>
+          <p:cNvSpPr/>
           <p:nvPr/>
-        </p:nvGraphicFramePr>
-        <p:xfrm>
-          <a:off x="685800" y="1353312"/>
-          <a:ext cx="9966959" cy="3273552"/>
-        </p:xfrm>
-        <a:graphic>
-          <a:graphicData uri="http://schemas.openxmlformats.org/drawingml/2006/table">
-            <a:tbl>
-              <a:tblPr firstRow="1" bandRow="1">
-                <a:tableStyleId>{5C22544A-7EE6-4342-B048-85BDC9FD1C3A}</a:tableStyleId>
-              </a:tblPr>
-              <a:tblGrid>
-                <a:gridCol w="1600200"/>
-                <a:gridCol w="3977639"/>
-                <a:gridCol w="4389120"/>
-              </a:tblGrid>
-              <a:tr h="438912">
-                <a:tc>
-                  <a:txBody>
-                    <a:bodyPr wrap="square"/>
-                    <a:lstStyle/>
-                    <a:p>
-                      <a:r>
-                        <a:rPr sz="1200" b="1">
-                          <a:solidFill>
-                            <a:srgbClr val="FFFFFF"/>
-                          </a:solidFill>
-                          <a:latin typeface="Microsoft YaHei"/>
-                        </a:rPr>
-                        <a:t>场景</a:t>
-                      </a:r>
-                    </a:p>
-                  </a:txBody>
-                  <a:tcPr marL="64008" marR="64008" marT="27432" marB="27432" anchor="ctr">
-                    <a:solidFill>
-                      <a:srgbClr val="17324D"/>
-                    </a:solidFill>
-                  </a:tcPr>
-                </a:tc>
-                <a:tc>
-                  <a:txBody>
-                    <a:bodyPr wrap="square"/>
-                    <a:lstStyle/>
-                    <a:p>
-                      <a:r>
-                        <a:rPr sz="1200" b="1">
-                          <a:solidFill>
-                            <a:srgbClr val="FFFFFF"/>
-                          </a:solidFill>
-                          <a:latin typeface="Microsoft YaHei"/>
-                        </a:rPr>
-                        <a:t>数据</a:t>
-                      </a:r>
-                    </a:p>
-                  </a:txBody>
-                  <a:tcPr marL="64008" marR="64008" marT="27432" marB="27432" anchor="ctr">
-                    <a:solidFill>
-                      <a:srgbClr val="17324D"/>
-                    </a:solidFill>
-                  </a:tcPr>
-                </a:tc>
-                <a:tc>
-                  <a:txBody>
-                    <a:bodyPr wrap="square"/>
-                    <a:lstStyle/>
-                    <a:p>
-                      <a:r>
-                        <a:rPr sz="1200" b="1">
-                          <a:solidFill>
-                            <a:srgbClr val="FFFFFF"/>
-                          </a:solidFill>
-                          <a:latin typeface="Microsoft YaHei"/>
-                        </a:rPr>
-                        <a:t>目的</a:t>
-                      </a:r>
-                    </a:p>
-                  </a:txBody>
-                  <a:tcPr marL="64008" marR="64008" marT="27432" marB="27432" anchor="ctr">
-                    <a:solidFill>
-                      <a:srgbClr val="17324D"/>
-                    </a:solidFill>
-                  </a:tcPr>
-                </a:tc>
-              </a:tr>
-              <a:tr h="566928">
-                <a:tc>
-                  <a:txBody>
-                    <a:bodyPr wrap="square"/>
-                    <a:lstStyle/>
-                    <a:p>
-                      <a:r>
-                        <a:rPr sz="1100" b="0">
-                          <a:solidFill>
-                            <a:srgbClr val="1D2731"/>
-                          </a:solidFill>
-                          <a:latin typeface="Microsoft YaHei"/>
-                        </a:rPr>
-                        <a:t>流程试跑</a:t>
-                      </a:r>
-                    </a:p>
-                  </a:txBody>
-                  <a:tcPr marL="64008" marR="64008" marT="27432" marB="27432" anchor="ctr">
-                    <a:solidFill>
-                      <a:srgbClr val="FFFFFF"/>
-                    </a:solidFill>
-                  </a:tcPr>
-                </a:tc>
-                <a:tc>
-                  <a:txBody>
-                    <a:bodyPr wrap="square"/>
-                    <a:lstStyle/>
-                    <a:p>
-                      <a:r>
-                        <a:rPr sz="1100" b="0">
-                          <a:solidFill>
-                            <a:srgbClr val="1D2731"/>
-                          </a:solidFill>
-                          <a:latin typeface="Microsoft YaHei"/>
-                        </a:rPr>
-                        <a:t>HEART 2-3 物种 CM/FB</a:t>
-                      </a:r>
-                    </a:p>
-                  </a:txBody>
-                  <a:tcPr marL="64008" marR="64008" marT="27432" marB="27432" anchor="ctr">
-                    <a:solidFill>
-                      <a:srgbClr val="FFFFFF"/>
-                    </a:solidFill>
-                  </a:tcPr>
-                </a:tc>
-                <a:tc>
-                  <a:txBody>
-                    <a:bodyPr wrap="square"/>
-                    <a:lstStyle/>
-                    <a:p>
-                      <a:r>
-                        <a:rPr sz="1100" b="0">
-                          <a:solidFill>
-                            <a:srgbClr val="1D2731"/>
-                          </a:solidFill>
-                          <a:latin typeface="Microsoft YaHei"/>
-                        </a:rPr>
-                        <a:t>验证端到端闭环</a:t>
-                      </a:r>
-                    </a:p>
-                  </a:txBody>
-                  <a:tcPr marL="64008" marR="64008" marT="27432" marB="27432" anchor="ctr">
-                    <a:solidFill>
-                      <a:srgbClr val="FFFFFF"/>
-                    </a:solidFill>
-                  </a:tcPr>
-                </a:tc>
-              </a:tr>
-              <a:tr h="566928">
-                <a:tc>
-                  <a:txBody>
-                    <a:bodyPr wrap="square"/>
-                    <a:lstStyle/>
-                    <a:p>
-                      <a:r>
-                        <a:rPr sz="1100" b="0">
-                          <a:solidFill>
-                            <a:srgbClr val="1D2731"/>
-                          </a:solidFill>
-                          <a:latin typeface="Microsoft YaHei"/>
-                        </a:rPr>
-                        <a:t>近缘组合</a:t>
-                      </a:r>
-                    </a:p>
-                  </a:txBody>
-                  <a:tcPr marL="64008" marR="64008" marT="27432" marB="27432" anchor="ctr">
-                    <a:solidFill>
-                      <a:srgbClr val="F2F6F8"/>
-                    </a:solidFill>
-                  </a:tcPr>
-                </a:tc>
-                <a:tc>
-                  <a:txBody>
-                    <a:bodyPr wrap="square"/>
-                    <a:lstStyle/>
-                    <a:p>
-                      <a:r>
-                        <a:rPr sz="1100" b="0">
-                          <a:solidFill>
-                            <a:srgbClr val="1D2731"/>
-                          </a:solidFill>
-                          <a:latin typeface="Microsoft YaHei"/>
-                        </a:rPr>
-                        <a:t>待 DCS 核实物种</a:t>
-                      </a:r>
-                    </a:p>
-                  </a:txBody>
-                  <a:tcPr marL="64008" marR="64008" marT="27432" marB="27432" anchor="ctr">
-                    <a:solidFill>
-                      <a:srgbClr val="F2F6F8"/>
-                    </a:solidFill>
-                  </a:tcPr>
-                </a:tc>
-                <a:tc>
-                  <a:txBody>
-                    <a:bodyPr wrap="square"/>
-                    <a:lstStyle/>
-                    <a:p>
-                      <a:r>
-                        <a:rPr sz="1100" b="0">
-                          <a:solidFill>
-                            <a:srgbClr val="1D2731"/>
-                          </a:solidFill>
-                          <a:latin typeface="Microsoft YaHei"/>
-                        </a:rPr>
-                        <a:t>检验保守细胞类型标签转移</a:t>
-                      </a:r>
-                    </a:p>
-                  </a:txBody>
-                  <a:tcPr marL="64008" marR="64008" marT="27432" marB="27432" anchor="ctr">
-                    <a:solidFill>
-                      <a:srgbClr val="F2F6F8"/>
-                    </a:solidFill>
-                  </a:tcPr>
-                </a:tc>
-              </a:tr>
-              <a:tr h="566928">
-                <a:tc>
-                  <a:txBody>
-                    <a:bodyPr wrap="square"/>
-                    <a:lstStyle/>
-                    <a:p>
-                      <a:r>
-                        <a:rPr sz="1100" b="0">
-                          <a:solidFill>
-                            <a:srgbClr val="1D2731"/>
-                          </a:solidFill>
-                          <a:latin typeface="Microsoft YaHei"/>
-                        </a:rPr>
-                        <a:t>远缘组合</a:t>
-                      </a:r>
-                    </a:p>
-                  </a:txBody>
-                  <a:tcPr marL="64008" marR="64008" marT="27432" marB="27432" anchor="ctr">
-                    <a:solidFill>
-                      <a:srgbClr val="FFFFFF"/>
-                    </a:solidFill>
-                  </a:tcPr>
-                </a:tc>
-                <a:tc>
-                  <a:txBody>
-                    <a:bodyPr wrap="square"/>
-                    <a:lstStyle/>
-                    <a:p>
-                      <a:r>
-                        <a:rPr sz="1100" b="0">
-                          <a:solidFill>
-                            <a:srgbClr val="1D2731"/>
-                          </a:solidFill>
-                          <a:latin typeface="Microsoft YaHei"/>
-                        </a:rPr>
-                        <a:t>待 DCS 核实物种</a:t>
-                      </a:r>
-                    </a:p>
-                  </a:txBody>
-                  <a:tcPr marL="64008" marR="64008" marT="27432" marB="27432" anchor="ctr">
-                    <a:solidFill>
-                      <a:srgbClr val="FFFFFF"/>
-                    </a:solidFill>
-                  </a:tcPr>
-                </a:tc>
-                <a:tc>
-                  <a:txBody>
-                    <a:bodyPr wrap="square"/>
-                    <a:lstStyle/>
-                    <a:p>
-                      <a:r>
-                        <a:rPr sz="1100" b="0">
-                          <a:solidFill>
-                            <a:srgbClr val="1D2731"/>
-                          </a:solidFill>
-                          <a:latin typeface="Microsoft YaHei"/>
-                        </a:rPr>
-                        <a:t>检验跨大距离整合能力</a:t>
-                      </a:r>
-                    </a:p>
-                  </a:txBody>
-                  <a:tcPr marL="64008" marR="64008" marT="27432" marB="27432" anchor="ctr">
-                    <a:solidFill>
-                      <a:srgbClr val="FFFFFF"/>
-                    </a:solidFill>
-                  </a:tcPr>
-                </a:tc>
-              </a:tr>
-              <a:tr h="566928">
-                <a:tc>
-                  <a:txBody>
-                    <a:bodyPr wrap="square"/>
-                    <a:lstStyle/>
-                    <a:p>
-                      <a:r>
-                        <a:rPr sz="1100" b="0">
-                          <a:solidFill>
-                            <a:srgbClr val="1D2731"/>
-                          </a:solidFill>
-                          <a:latin typeface="Microsoft YaHei"/>
-                        </a:rPr>
-                        <a:t>混合类别</a:t>
-                      </a:r>
-                    </a:p>
-                  </a:txBody>
-                  <a:tcPr marL="64008" marR="64008" marT="27432" marB="27432" anchor="ctr">
-                    <a:solidFill>
-                      <a:srgbClr val="F2F6F8"/>
-                    </a:solidFill>
-                  </a:tcPr>
-                </a:tc>
-                <a:tc>
-                  <a:txBody>
-                    <a:bodyPr wrap="square"/>
-                    <a:lstStyle/>
-                    <a:p>
-                      <a:r>
-                        <a:rPr sz="1100" b="0">
-                          <a:solidFill>
-                            <a:srgbClr val="1D2731"/>
-                          </a:solidFill>
-                          <a:latin typeface="Microsoft YaHei"/>
-                        </a:rPr>
-                        <a:t>待 DCS 核实物种</a:t>
-                      </a:r>
-                    </a:p>
-                  </a:txBody>
-                  <a:tcPr marL="64008" marR="64008" marT="27432" marB="27432" anchor="ctr">
-                    <a:solidFill>
-                      <a:srgbClr val="F2F6F8"/>
-                    </a:solidFill>
-                  </a:tcPr>
-                </a:tc>
-                <a:tc>
-                  <a:txBody>
-                    <a:bodyPr wrap="square"/>
-                    <a:lstStyle/>
-                    <a:p>
-                      <a:r>
-                        <a:rPr sz="1100" b="0">
-                          <a:solidFill>
-                            <a:srgbClr val="1D2731"/>
-                          </a:solidFill>
-                          <a:latin typeface="Microsoft YaHei"/>
-                        </a:rPr>
-                        <a:t>检验类型结构差异</a:t>
-                      </a:r>
-                    </a:p>
-                  </a:txBody>
-                  <a:tcPr marL="64008" marR="64008" marT="27432" marB="27432" anchor="ctr">
-                    <a:solidFill>
-                      <a:srgbClr val="F2F6F8"/>
-                    </a:solidFill>
-                  </a:tcPr>
-                </a:tc>
-              </a:tr>
-              <a:tr h="566928">
-                <a:tc>
-                  <a:txBody>
-                    <a:bodyPr wrap="square"/>
-                    <a:lstStyle/>
-                    <a:p>
-                      <a:r>
-                        <a:rPr sz="1100" b="0">
-                          <a:solidFill>
-                            <a:srgbClr val="1D2731"/>
-                          </a:solidFill>
-                          <a:latin typeface="Microsoft YaHei"/>
-                        </a:rPr>
-                        <a:t>LBSPA 补充</a:t>
-                      </a:r>
-                    </a:p>
-                  </a:txBody>
-                  <a:tcPr marL="64008" marR="64008" marT="27432" marB="27432" anchor="ctr">
-                    <a:solidFill>
-                      <a:srgbClr val="FFFFFF"/>
-                    </a:solidFill>
-                  </a:tcPr>
-                </a:tc>
-                <a:tc>
-                  <a:txBody>
-                    <a:bodyPr wrap="square"/>
-                    <a:lstStyle/>
-                    <a:p>
-                      <a:r>
-                        <a:rPr sz="1100" b="0">
-                          <a:solidFill>
-                            <a:srgbClr val="1D2731"/>
-                          </a:solidFill>
-                          <a:latin typeface="Microsoft YaHei"/>
-                        </a:rPr>
-                        <a:t>七鳃鳗-小鼠 snRNA 小子集</a:t>
-                      </a:r>
-                    </a:p>
-                  </a:txBody>
-                  <a:tcPr marL="64008" marR="64008" marT="27432" marB="27432" anchor="ctr">
-                    <a:solidFill>
-                      <a:srgbClr val="FFFFFF"/>
-                    </a:solidFill>
-                  </a:tcPr>
-                </a:tc>
-                <a:tc>
-                  <a:txBody>
-                    <a:bodyPr wrap="square"/>
-                    <a:lstStyle/>
-                    <a:p>
-                      <a:r>
-                        <a:rPr sz="1100" b="0">
-                          <a:solidFill>
-                            <a:srgbClr val="1D2731"/>
-                          </a:solidFill>
-                          <a:latin typeface="Microsoft YaHei"/>
-                        </a:rPr>
-                        <a:t>主结论后做稳健性补充</a:t>
-                      </a:r>
-                    </a:p>
-                  </a:txBody>
-                  <a:tcPr marL="64008" marR="64008" marT="27432" marB="27432" anchor="ctr">
-                    <a:solidFill>
-                      <a:srgbClr val="FFFFFF"/>
-                    </a:solidFill>
-                  </a:tcPr>
-                </a:tc>
-              </a:tr>
-            </a:tbl>
-          </a:graphicData>
-        </a:graphic>
-      </p:graphicFrame>
-      <p:sp>
-        <p:nvSpPr>
-          <p:cNvPr id="5" name="TextBox 4"/>
+        </p:nvSpPr>
+        <p:spPr>
+          <a:xfrm>
+            <a:off x="658368" y="1389888"/>
+            <a:ext cx="1298448" cy="530352"/>
+          </a:xfrm>
+          <a:prstGeom prst="roundRect">
+            <a:avLst>
+              <a:gd name="adj" fmla="val 16000"/>
+            </a:avLst>
+          </a:prstGeom>
+          <a:solidFill>
+            <a:srgbClr val="17324D"/>
+          </a:solidFill>
+          <a:ln>
+            <a:noFill/>
+          </a:ln>
+        </p:spPr>
+        <p:style>
+          <a:lnRef idx="1">
+            <a:schemeClr val="accent1"/>
+          </a:lnRef>
+          <a:fillRef idx="3">
+            <a:schemeClr val="accent1"/>
+          </a:fillRef>
+          <a:effectRef idx="2">
+            <a:schemeClr val="accent1"/>
+          </a:effectRef>
+          <a:fontRef idx="minor">
+            <a:schemeClr val="lt1"/>
+          </a:fontRef>
+        </p:style>
+        <p:txBody>
+          <a:bodyPr rtlCol="0" anchor="ctr" wrap="square" lIns="27432" rIns="27432"/>
+          <a:lstStyle/>
+          <a:p>
+            <a:pPr algn="ctr"/>
+            <a:r>
+              <a:rPr sz="1050" b="1">
+                <a:solidFill>
+                  <a:srgbClr val="FFFFFF"/>
+                </a:solidFill>
+                <a:latin typeface="Microsoft YaHei"/>
+              </a:rPr>
+              <a:t>选数据</a:t>
+            </a:r>
+          </a:p>
+        </p:txBody>
+      </p:sp>
+      <p:sp>
+        <p:nvSpPr>
+          <p:cNvPr id="5" name="Right Arrow 4"/>
+          <p:cNvSpPr/>
+          <p:nvPr/>
+        </p:nvSpPr>
+        <p:spPr>
+          <a:xfrm>
+            <a:off x="1979675" y="1572768"/>
+            <a:ext cx="100584" cy="164592"/>
+          </a:xfrm>
+          <a:prstGeom prst="rightArrow">
+            <a:avLst/>
+          </a:prstGeom>
+          <a:solidFill>
+            <a:srgbClr val="B7791F"/>
+          </a:solidFill>
+          <a:ln>
+            <a:noFill/>
+          </a:ln>
+        </p:spPr>
+        <p:style>
+          <a:lnRef idx="1">
+            <a:schemeClr val="accent1"/>
+          </a:lnRef>
+          <a:fillRef idx="3">
+            <a:schemeClr val="accent1"/>
+          </a:fillRef>
+          <a:effectRef idx="2">
+            <a:schemeClr val="accent1"/>
+          </a:effectRef>
+          <a:fontRef idx="minor">
+            <a:schemeClr val="lt1"/>
+          </a:fontRef>
+        </p:style>
+        <p:txBody>
+          <a:bodyPr rtlCol="0" anchor="ctr"/>
+          <a:lstStyle/>
+          <a:p>
+            <a:pPr algn="ctr"/>
+          </a:p>
+        </p:txBody>
+      </p:sp>
+      <p:sp>
+        <p:nvSpPr>
+          <p:cNvPr id="6" name="Rounded Rectangle 5"/>
+          <p:cNvSpPr/>
+          <p:nvPr/>
+        </p:nvSpPr>
+        <p:spPr>
+          <a:xfrm>
+            <a:off x="2103120" y="1389888"/>
+            <a:ext cx="1298448" cy="530352"/>
+          </a:xfrm>
+          <a:prstGeom prst="roundRect">
+            <a:avLst>
+              <a:gd name="adj" fmla="val 16000"/>
+            </a:avLst>
+          </a:prstGeom>
+          <a:solidFill>
+            <a:srgbClr val="147D73"/>
+          </a:solidFill>
+          <a:ln>
+            <a:noFill/>
+          </a:ln>
+        </p:spPr>
+        <p:style>
+          <a:lnRef idx="1">
+            <a:schemeClr val="accent1"/>
+          </a:lnRef>
+          <a:fillRef idx="3">
+            <a:schemeClr val="accent1"/>
+          </a:fillRef>
+          <a:effectRef idx="2">
+            <a:schemeClr val="accent1"/>
+          </a:effectRef>
+          <a:fontRef idx="minor">
+            <a:schemeClr val="lt1"/>
+          </a:fontRef>
+        </p:style>
+        <p:txBody>
+          <a:bodyPr rtlCol="0" anchor="ctr" wrap="square" lIns="27432" rIns="27432"/>
+          <a:lstStyle/>
+          <a:p>
+            <a:pPr algn="ctr"/>
+            <a:r>
+              <a:rPr sz="1050" b="1">
+                <a:solidFill>
+                  <a:srgbClr val="FFFFFF"/>
+                </a:solidFill>
+                <a:latin typeface="Microsoft YaHei"/>
+              </a:rPr>
+              <a:t>小试跑</a:t>
+            </a:r>
+          </a:p>
+        </p:txBody>
+      </p:sp>
+      <p:sp>
+        <p:nvSpPr>
+          <p:cNvPr id="7" name="Right Arrow 6"/>
+          <p:cNvSpPr/>
+          <p:nvPr/>
+        </p:nvSpPr>
+        <p:spPr>
+          <a:xfrm>
+            <a:off x="3424427" y="1572768"/>
+            <a:ext cx="100584" cy="164592"/>
+          </a:xfrm>
+          <a:prstGeom prst="rightArrow">
+            <a:avLst/>
+          </a:prstGeom>
+          <a:solidFill>
+            <a:srgbClr val="B7791F"/>
+          </a:solidFill>
+          <a:ln>
+            <a:noFill/>
+          </a:ln>
+        </p:spPr>
+        <p:style>
+          <a:lnRef idx="1">
+            <a:schemeClr val="accent1"/>
+          </a:lnRef>
+          <a:fillRef idx="3">
+            <a:schemeClr val="accent1"/>
+          </a:fillRef>
+          <a:effectRef idx="2">
+            <a:schemeClr val="accent1"/>
+          </a:effectRef>
+          <a:fontRef idx="minor">
+            <a:schemeClr val="lt1"/>
+          </a:fontRef>
+        </p:style>
+        <p:txBody>
+          <a:bodyPr rtlCol="0" anchor="ctr"/>
+          <a:lstStyle/>
+          <a:p>
+            <a:pPr algn="ctr"/>
+          </a:p>
+        </p:txBody>
+      </p:sp>
+      <p:sp>
+        <p:nvSpPr>
+          <p:cNvPr id="8" name="Rounded Rectangle 7"/>
+          <p:cNvSpPr/>
+          <p:nvPr/>
+        </p:nvSpPr>
+        <p:spPr>
+          <a:xfrm>
+            <a:off x="3547872" y="1389888"/>
+            <a:ext cx="1298448" cy="530352"/>
+          </a:xfrm>
+          <a:prstGeom prst="roundRect">
+            <a:avLst>
+              <a:gd name="adj" fmla="val 16000"/>
+            </a:avLst>
+          </a:prstGeom>
+          <a:solidFill>
+            <a:srgbClr val="17324D"/>
+          </a:solidFill>
+          <a:ln>
+            <a:noFill/>
+          </a:ln>
+        </p:spPr>
+        <p:style>
+          <a:lnRef idx="1">
+            <a:schemeClr val="accent1"/>
+          </a:lnRef>
+          <a:fillRef idx="3">
+            <a:schemeClr val="accent1"/>
+          </a:fillRef>
+          <a:effectRef idx="2">
+            <a:schemeClr val="accent1"/>
+          </a:effectRef>
+          <a:fontRef idx="minor">
+            <a:schemeClr val="lt1"/>
+          </a:fontRef>
+        </p:style>
+        <p:txBody>
+          <a:bodyPr rtlCol="0" anchor="ctr" wrap="square" lIns="27432" rIns="27432"/>
+          <a:lstStyle/>
+          <a:p>
+            <a:pPr algn="ctr"/>
+            <a:r>
+              <a:rPr sz="1050" b="1">
+                <a:solidFill>
+                  <a:srgbClr val="FFFFFF"/>
+                </a:solidFill>
+                <a:latin typeface="Microsoft YaHei"/>
+              </a:rPr>
+              <a:t>统一打分</a:t>
+            </a:r>
+          </a:p>
+        </p:txBody>
+      </p:sp>
+      <p:sp>
+        <p:nvSpPr>
+          <p:cNvPr id="9" name="Right Arrow 8"/>
+          <p:cNvSpPr/>
+          <p:nvPr/>
+        </p:nvSpPr>
+        <p:spPr>
+          <a:xfrm>
+            <a:off x="4869180" y="1572768"/>
+            <a:ext cx="100584" cy="164592"/>
+          </a:xfrm>
+          <a:prstGeom prst="rightArrow">
+            <a:avLst/>
+          </a:prstGeom>
+          <a:solidFill>
+            <a:srgbClr val="B7791F"/>
+          </a:solidFill>
+          <a:ln>
+            <a:noFill/>
+          </a:ln>
+        </p:spPr>
+        <p:style>
+          <a:lnRef idx="1">
+            <a:schemeClr val="accent1"/>
+          </a:lnRef>
+          <a:fillRef idx="3">
+            <a:schemeClr val="accent1"/>
+          </a:fillRef>
+          <a:effectRef idx="2">
+            <a:schemeClr val="accent1"/>
+          </a:effectRef>
+          <a:fontRef idx="minor">
+            <a:schemeClr val="lt1"/>
+          </a:fontRef>
+        </p:style>
+        <p:txBody>
+          <a:bodyPr rtlCol="0" anchor="ctr"/>
+          <a:lstStyle/>
+          <a:p>
+            <a:pPr algn="ctr"/>
+          </a:p>
+        </p:txBody>
+      </p:sp>
+      <p:sp>
+        <p:nvSpPr>
+          <p:cNvPr id="10" name="Rounded Rectangle 9"/>
+          <p:cNvSpPr/>
+          <p:nvPr/>
+        </p:nvSpPr>
+        <p:spPr>
+          <a:xfrm>
+            <a:off x="4992623" y="1389888"/>
+            <a:ext cx="1298448" cy="530352"/>
+          </a:xfrm>
+          <a:prstGeom prst="roundRect">
+            <a:avLst>
+              <a:gd name="adj" fmla="val 16000"/>
+            </a:avLst>
+          </a:prstGeom>
+          <a:solidFill>
+            <a:srgbClr val="17324D"/>
+          </a:solidFill>
+          <a:ln>
+            <a:noFill/>
+          </a:ln>
+        </p:spPr>
+        <p:style>
+          <a:lnRef idx="1">
+            <a:schemeClr val="accent1"/>
+          </a:lnRef>
+          <a:fillRef idx="3">
+            <a:schemeClr val="accent1"/>
+          </a:fillRef>
+          <a:effectRef idx="2">
+            <a:schemeClr val="accent1"/>
+          </a:effectRef>
+          <a:fontRef idx="minor">
+            <a:schemeClr val="lt1"/>
+          </a:fontRef>
+        </p:style>
+        <p:txBody>
+          <a:bodyPr rtlCol="0" anchor="ctr" wrap="square" lIns="27432" rIns="27432"/>
+          <a:lstStyle/>
+          <a:p>
+            <a:pPr algn="ctr"/>
+            <a:r>
+              <a:rPr sz="1050" b="1">
+                <a:solidFill>
+                  <a:srgbClr val="FFFFFF"/>
+                </a:solidFill>
+                <a:latin typeface="Microsoft YaHei"/>
+              </a:rPr>
+              <a:t>扩场景</a:t>
+            </a:r>
+          </a:p>
+        </p:txBody>
+      </p:sp>
+      <p:sp>
+        <p:nvSpPr>
+          <p:cNvPr id="11" name="Right Arrow 10"/>
+          <p:cNvSpPr/>
+          <p:nvPr/>
+        </p:nvSpPr>
+        <p:spPr>
+          <a:xfrm>
+            <a:off x="6313931" y="1572768"/>
+            <a:ext cx="100584" cy="164592"/>
+          </a:xfrm>
+          <a:prstGeom prst="rightArrow">
+            <a:avLst/>
+          </a:prstGeom>
+          <a:solidFill>
+            <a:srgbClr val="B7791F"/>
+          </a:solidFill>
+          <a:ln>
+            <a:noFill/>
+          </a:ln>
+        </p:spPr>
+        <p:style>
+          <a:lnRef idx="1">
+            <a:schemeClr val="accent1"/>
+          </a:lnRef>
+          <a:fillRef idx="3">
+            <a:schemeClr val="accent1"/>
+          </a:fillRef>
+          <a:effectRef idx="2">
+            <a:schemeClr val="accent1"/>
+          </a:effectRef>
+          <a:fontRef idx="minor">
+            <a:schemeClr val="lt1"/>
+          </a:fontRef>
+        </p:style>
+        <p:txBody>
+          <a:bodyPr rtlCol="0" anchor="ctr"/>
+          <a:lstStyle/>
+          <a:p>
+            <a:pPr algn="ctr"/>
+          </a:p>
+        </p:txBody>
+      </p:sp>
+      <p:sp>
+        <p:nvSpPr>
+          <p:cNvPr id="12" name="Rounded Rectangle 11"/>
+          <p:cNvSpPr/>
+          <p:nvPr/>
+        </p:nvSpPr>
+        <p:spPr>
+          <a:xfrm>
+            <a:off x="6437375" y="1389888"/>
+            <a:ext cx="1298448" cy="530352"/>
+          </a:xfrm>
+          <a:prstGeom prst="roundRect">
+            <a:avLst>
+              <a:gd name="adj" fmla="val 16000"/>
+            </a:avLst>
+          </a:prstGeom>
+          <a:solidFill>
+            <a:srgbClr val="147D73"/>
+          </a:solidFill>
+          <a:ln>
+            <a:noFill/>
+          </a:ln>
+        </p:spPr>
+        <p:style>
+          <a:lnRef idx="1">
+            <a:schemeClr val="accent1"/>
+          </a:lnRef>
+          <a:fillRef idx="3">
+            <a:schemeClr val="accent1"/>
+          </a:fillRef>
+          <a:effectRef idx="2">
+            <a:schemeClr val="accent1"/>
+          </a:effectRef>
+          <a:fontRef idx="minor">
+            <a:schemeClr val="lt1"/>
+          </a:fontRef>
+        </p:style>
+        <p:txBody>
+          <a:bodyPr rtlCol="0" anchor="ctr" wrap="square" lIns="27432" rIns="27432"/>
+          <a:lstStyle/>
+          <a:p>
+            <a:pPr algn="ctr"/>
+            <a:r>
+              <a:rPr sz="1050" b="1">
+                <a:solidFill>
+                  <a:srgbClr val="FFFFFF"/>
+                </a:solidFill>
+                <a:latin typeface="Microsoft YaHei"/>
+              </a:rPr>
+              <a:t>写报告</a:t>
+            </a:r>
+          </a:p>
+        </p:txBody>
+      </p:sp>
+      <p:sp>
+        <p:nvSpPr>
+          <p:cNvPr id="13" name="TextBox 12"/>
+          <p:cNvSpPr txBox="1"/>
+          <p:nvPr/>
+        </p:nvSpPr>
+        <p:spPr>
+          <a:xfrm>
+            <a:off x="749808" y="2148840"/>
+            <a:ext cx="10195560" cy="3675887"/>
+          </a:xfrm>
+          <a:prstGeom prst="rect">
+            <a:avLst/>
+          </a:prstGeom>
+          <a:noFill/>
+        </p:spPr>
+        <p:txBody>
+          <a:bodyPr wrap="square" lIns="36576" rIns="36576">
+            <a:spAutoFit/>
+          </a:bodyPr>
+          <a:lstStyle/>
+          <a:p>
+            <a:pPr>
+              <a:lnSpc>
+                <a:spcPct val="128000"/>
+              </a:lnSpc>
+              <a:spcAft>
+                <a:spcPts val="1500"/>
+              </a:spcAft>
+            </a:pPr>
+            <a:r>
+              <a:rPr sz="1700">
+                <a:solidFill>
+                  <a:srgbClr val="1D2731"/>
+                </a:solidFill>
+                <a:latin typeface="Microsoft YaHei"/>
+              </a:rPr>
+              <a:t>选数据：从课程数据里选 2-3 个物种的心脏细胞（心肌细胞、成纤维细胞两类）</a:t>
+            </a:r>
+          </a:p>
+          <a:p>
+            <a:pPr>
+              <a:lnSpc>
+                <a:spcPct val="128000"/>
+              </a:lnSpc>
+              <a:spcAft>
+                <a:spcPts val="1500"/>
+              </a:spcAft>
+            </a:pPr>
+            <a:r>
+              <a:rPr sz="1700">
+                <a:solidFill>
+                  <a:srgbClr val="1D2731"/>
+                </a:solidFill>
+                <a:latin typeface="Microsoft YaHei"/>
+              </a:rPr>
+              <a:t>小试跑：三个工具各跑通一次，只验证“能不能跑完”，不比名次</a:t>
+            </a:r>
+          </a:p>
+          <a:p>
+            <a:pPr>
+              <a:lnSpc>
+                <a:spcPct val="128000"/>
+              </a:lnSpc>
+              <a:spcAft>
+                <a:spcPts val="1500"/>
+              </a:spcAft>
+            </a:pPr>
+            <a:r>
+              <a:rPr sz="1700">
+                <a:solidFill>
+                  <a:srgbClr val="1D2731"/>
+                </a:solidFill>
+                <a:latin typeface="Microsoft YaHei"/>
+              </a:rPr>
+              <a:t>统一打分：同一套指标给三个工具打分，重复 3 次取平均</a:t>
+            </a:r>
+          </a:p>
+          <a:p>
+            <a:pPr>
+              <a:lnSpc>
+                <a:spcPct val="128000"/>
+              </a:lnSpc>
+              <a:spcAft>
+                <a:spcPts val="1500"/>
+              </a:spcAft>
+            </a:pPr>
+            <a:r>
+              <a:rPr sz="1700">
+                <a:solidFill>
+                  <a:srgbClr val="1D2731"/>
+                </a:solidFill>
+                <a:latin typeface="Microsoft YaHei"/>
+              </a:rPr>
+              <a:t>扩场景：加入近缘、远缘、不同类别物种组合，看工具表现怎么变</a:t>
+            </a:r>
+          </a:p>
+          <a:p>
+            <a:pPr>
+              <a:lnSpc>
+                <a:spcPct val="128000"/>
+              </a:lnSpc>
+              <a:spcAft>
+                <a:spcPts val="1500"/>
+              </a:spcAft>
+            </a:pPr>
+            <a:r>
+              <a:rPr sz="1700">
+                <a:solidFill>
+                  <a:srgbClr val="1D2731"/>
+                </a:solidFill>
+                <a:latin typeface="Microsoft YaHei"/>
+              </a:rPr>
+              <a:t>写报告：结果、耗时、花费、失败原因全部写进报告</a:t>
+            </a:r>
+          </a:p>
+        </p:txBody>
+      </p:sp>
+      <p:sp>
+        <p:nvSpPr>
+          <p:cNvPr id="14" name="TextBox 13"/>
           <p:cNvSpPr txBox="1"/>
           <p:nvPr/>
         </p:nvSpPr>
@@ -8858,7 +8842,7 @@
       </p:sp>
       <p:sp>
         <p:nvSpPr>
-          <p:cNvPr id="6" name="TextBox 5"/>
+          <p:cNvPr id="15" name="TextBox 14"/>
           <p:cNvSpPr txBox="1"/>
           <p:nvPr/>
         </p:nvSpPr>
@@ -8996,21 +8980,64 @@
                 </a:solidFill>
                 <a:latin typeface="Microsoft YaHei"/>
               </a:rPr>
-              <a:t>统一评测协议</a:t>
-            </a:r>
-          </a:p>
-        </p:txBody>
-      </p:sp>
-      <p:sp>
-        <p:nvSpPr>
-          <p:cNvPr id="4" name="TextBox 3"/>
+              <a:t>怎么保证比较是公平的</a:t>
+            </a:r>
+          </a:p>
+        </p:txBody>
+      </p:sp>
+      <p:sp>
+        <p:nvSpPr>
+          <p:cNvPr id="4" name="Rectangle 3"/>
+          <p:cNvSpPr/>
+          <p:nvPr/>
+        </p:nvSpPr>
+        <p:spPr>
+          <a:xfrm>
+            <a:off x="0" y="5193792"/>
+            <a:ext cx="12191695" cy="914400"/>
+          </a:xfrm>
+          <a:prstGeom prst="rect">
+            <a:avLst/>
+          </a:prstGeom>
+          <a:solidFill>
+            <a:srgbClr val="F2F6F8"/>
+          </a:solidFill>
+          <a:ln>
+            <a:noFill/>
+          </a:ln>
+        </p:spPr>
+        <p:style>
+          <a:lnRef idx="1">
+            <a:schemeClr val="accent1"/>
+          </a:lnRef>
+          <a:fillRef idx="3">
+            <a:schemeClr val="accent1"/>
+          </a:fillRef>
+          <a:effectRef idx="2">
+            <a:schemeClr val="accent1"/>
+          </a:effectRef>
+          <a:fontRef idx="minor">
+            <a:schemeClr val="lt1"/>
+          </a:fontRef>
+        </p:style>
+        <p:txBody>
+          <a:bodyPr rtlCol="0" anchor="ctr"/>
+          <a:lstStyle/>
+          <a:p>
+            <a:pPr algn="ctr"/>
+          </a:p>
+        </p:txBody>
+      </p:sp>
+      <p:sp>
+        <p:nvSpPr>
+          <p:cNvPr id="5" name="TextBox 4"/>
           <p:cNvSpPr txBox="1"/>
           <p:nvPr/>
         </p:nvSpPr>
         <p:spPr>
           <a:xfrm>
-            <a:off x="749808" y="1353312"/>
-            <a:ext cx="10195560" cy="3566159"/>
+            <a:off x="749808" y="5321808"/>
+            <a:ext cx="10698480" cy="658368"/>
           </a:xfrm>
           <a:prstGeom prst="rect">
             <a:avLst/>
@@ -9018,6 +9045,40 @@
           <a:noFill/>
         </p:spPr>
         <p:txBody>
+          <a:bodyPr wrap="square">
+            <a:spAutoFit/>
+          </a:bodyPr>
+          <a:lstStyle/>
+          <a:p>
+            <a:r>
+              <a:rPr sz="1500" b="1">
+                <a:solidFill>
+                  <a:srgbClr val="17324D"/>
+                </a:solidFill>
+                <a:latin typeface="Microsoft YaHei"/>
+              </a:rPr>
+              <a:t>要点：公平 = 同输入、同规则、考题分开、重复三次、全程留痕。</a:t>
+            </a:r>
+          </a:p>
+        </p:txBody>
+      </p:sp>
+      <p:sp>
+        <p:nvSpPr>
+          <p:cNvPr id="6" name="TextBox 5"/>
+          <p:cNvSpPr txBox="1"/>
+          <p:nvPr/>
+        </p:nvSpPr>
+        <p:spPr>
+          <a:xfrm>
+            <a:off x="749808" y="1600200"/>
+            <a:ext cx="10195560" cy="3675887"/>
+          </a:xfrm>
+          <a:prstGeom prst="rect">
+            <a:avLst/>
+          </a:prstGeom>
+          <a:noFill/>
+        </p:spPr>
+        <p:txBody>
           <a:bodyPr wrap="square" lIns="36576" rIns="36576">
             <a:spAutoFit/>
           </a:bodyPr>
@@ -9025,48 +9086,48 @@
           <a:p>
             <a:pPr>
               <a:lnSpc>
-                <a:spcPct val="112000"/>
+                <a:spcPct val="128000"/>
               </a:lnSpc>
               <a:spcAft>
-                <a:spcPts val="900"/>
+                <a:spcPts val="1500"/>
               </a:spcAft>
             </a:pPr>
             <a:r>
-              <a:rPr sz="1500">
+              <a:rPr sz="1700">
                 <a:solidFill>
                   <a:srgbClr val="1D2731"/>
                 </a:solidFill>
                 <a:latin typeface="Microsoft YaHei"/>
               </a:rPr>
-              <a:t>相同输入：同一批细胞、QC 规则、标签字段和同源基因规则</a:t>
+              <a:t>同一批细胞：三个工具用完全相同的输入，谁也不多给数据</a:t>
             </a:r>
           </a:p>
           <a:p>
             <a:pPr>
               <a:lnSpc>
-                <a:spcPct val="112000"/>
+                <a:spcPct val="128000"/>
               </a:lnSpc>
               <a:spcAft>
-                <a:spcPts val="900"/>
+                <a:spcPts val="1500"/>
               </a:spcAft>
             </a:pPr>
             <a:r>
-              <a:rPr sz="1500">
+              <a:rPr sz="1700">
                 <a:solidFill>
                   <a:srgbClr val="1D2731"/>
                 </a:solidFill>
                 <a:latin typeface="Microsoft YaHei"/>
               </a:rPr>
-              <a:t>评估方式：留一物种标签转移，报告每折与聚合 macro-F1</a:t>
+              <a:t>同一张基因对照表：需要基因对应关系的工具，用同一份同源基因表</a:t>
             </a:r>
           </a:p>
           <a:p>
             <a:pPr>
               <a:lnSpc>
-                <a:spcPct val="112000"/>
+                <a:spcPct val="128000"/>
               </a:lnSpc>
               <a:spcAft>
-                <a:spcPts val="900"/>
+                <a:spcPts val="1500"/>
               </a:spcAft>
             </a:pPr>
             <a:r>
@@ -9076,71 +9137,52 @@
                 </a:solidFill>
                 <a:latin typeface="Microsoft YaHei"/>
               </a:rPr>
-              <a:t>随机种子：7、17、27；报告均值、标准差和失败折</a:t>
+              <a:t>考试分开出题：轮流留出一个物种当“考题”，用其余物种训练后去猜它的细胞类型（留一物种法）</a:t>
             </a:r>
           </a:p>
           <a:p>
             <a:pPr>
               <a:lnSpc>
-                <a:spcPct val="112000"/>
+                <a:spcPct val="128000"/>
               </a:lnSpc>
               <a:spcAft>
-                <a:spcPts val="900"/>
+                <a:spcPts val="1500"/>
               </a:spcAft>
             </a:pPr>
             <a:r>
-              <a:rPr sz="1500">
+              <a:rPr sz="1700">
                 <a:solidFill>
                   <a:srgbClr val="1D2731"/>
                 </a:solidFill>
                 <a:latin typeface="Microsoft YaHei"/>
               </a:rPr>
-              <a:t>指标：macro-F1、正式 kBET、iLISI、silhouette、时间和峰值内存</a:t>
+              <a:t>重复实验：同一实验用 3 个随机种子各跑一遍，报告平均和波动</a:t>
             </a:r>
           </a:p>
           <a:p>
             <a:pPr>
               <a:lnSpc>
-                <a:spcPct val="112000"/>
+                <a:spcPct val="128000"/>
               </a:lnSpc>
               <a:spcAft>
-                <a:spcPts val="900"/>
+                <a:spcPts val="1500"/>
               </a:spcAft>
             </a:pPr>
             <a:r>
-              <a:rPr sz="1500">
+              <a:rPr sz="1700">
                 <a:solidFill>
                   <a:srgbClr val="1D2731"/>
                 </a:solidFill>
                 <a:latin typeface="Microsoft YaHei"/>
               </a:rPr>
-              <a:t>诊断：同时看批次混合、生物保守性和物种过度混合</a:t>
-            </a:r>
-          </a:p>
-          <a:p>
-            <a:pPr>
-              <a:lnSpc>
-                <a:spcPct val="112000"/>
-              </a:lnSpc>
-              <a:spcAft>
-                <a:spcPts val="900"/>
-              </a:spcAft>
-            </a:pPr>
-            <a:r>
-              <a:rPr sz="1500">
-                <a:solidFill>
-                  <a:srgbClr val="1D2731"/>
-                </a:solidFill>
-                <a:latin typeface="Microsoft YaHei"/>
-              </a:rPr>
-              <a:t>Agent 友好度：文档、CLI/API、参数、输出、失败诊断、复现六项</a:t>
-            </a:r>
-          </a:p>
-        </p:txBody>
-      </p:sp>
-      <p:sp>
-        <p:nvSpPr>
-          <p:cNvPr id="5" name="TextBox 4"/>
+              <a:t>全程留痕：每次运行的输入、参数、日志、结果都存档，事后可查</a:t>
+            </a:r>
+          </a:p>
+        </p:txBody>
+      </p:sp>
+      <p:sp>
+        <p:nvSpPr>
+          <p:cNvPr id="7" name="TextBox 6"/>
           <p:cNvSpPr txBox="1"/>
           <p:nvPr/>
         </p:nvSpPr>
@@ -9178,7 +9220,7 @@
       </p:sp>
       <p:sp>
         <p:nvSpPr>
-          <p:cNvPr id="6" name="TextBox 5"/>
+          <p:cNvPr id="8" name="TextBox 7"/>
           <p:cNvSpPr txBox="1"/>
           <p:nvPr/>
         </p:nvSpPr>
@@ -9316,768 +9358,381 @@
                 </a:solidFill>
                 <a:latin typeface="Microsoft YaHei"/>
               </a:rPr>
-              <a:t>执行路线：R0-R6</a:t>
-            </a:r>
-          </a:p>
-        </p:txBody>
-      </p:sp>
-      <p:sp>
-        <p:nvSpPr>
-          <p:cNvPr id="4" name="Rounded Rectangle 3"/>
-          <p:cNvSpPr/>
+              <a:t>评分指标（每个都配了一句解释）</a:t>
+            </a:r>
+          </a:p>
+        </p:txBody>
+      </p:sp>
+      <p:graphicFrame>
+        <p:nvGraphicFramePr>
+          <p:cNvPr id="4" name="Table 3"/>
+          <p:cNvGraphicFramePr>
+            <a:graphicFrameLocks noGrp="1"/>
+          </p:cNvGraphicFramePr>
           <p:nvPr/>
-        </p:nvSpPr>
-        <p:spPr>
-          <a:xfrm>
-            <a:off x="658368" y="1389888"/>
-            <a:ext cx="1298448" cy="530352"/>
-          </a:xfrm>
-          <a:prstGeom prst="roundRect">
-            <a:avLst>
-              <a:gd name="adj" fmla="val 16000"/>
-            </a:avLst>
-          </a:prstGeom>
-          <a:solidFill>
-            <a:srgbClr val="17324D"/>
-          </a:solidFill>
-          <a:ln>
-            <a:noFill/>
-          </a:ln>
-        </p:spPr>
-        <p:style>
-          <a:lnRef idx="1">
-            <a:schemeClr val="accent1"/>
-          </a:lnRef>
-          <a:fillRef idx="3">
-            <a:schemeClr val="accent1"/>
-          </a:fillRef>
-          <a:effectRef idx="2">
-            <a:schemeClr val="accent1"/>
-          </a:effectRef>
-          <a:fontRef idx="minor">
-            <a:schemeClr val="lt1"/>
-          </a:fontRef>
-        </p:style>
-        <p:txBody>
-          <a:bodyPr rtlCol="0" anchor="ctr" wrap="square" lIns="27432" rIns="27432"/>
-          <a:lstStyle/>
-          <a:p>
-            <a:pPr algn="ctr"/>
-            <a:r>
-              <a:rPr sz="1050" b="1">
-                <a:solidFill>
-                  <a:srgbClr val="FFFFFF"/>
-                </a:solidFill>
-                <a:latin typeface="Microsoft YaHei"/>
-              </a:rPr>
-              <a:t>R0 认领</a:t>
-            </a:r>
-          </a:p>
-        </p:txBody>
-      </p:sp>
-      <p:sp>
-        <p:nvSpPr>
-          <p:cNvPr id="5" name="Right Arrow 4"/>
-          <p:cNvSpPr/>
-          <p:nvPr/>
-        </p:nvSpPr>
-        <p:spPr>
-          <a:xfrm>
-            <a:off x="1979675" y="1572768"/>
-            <a:ext cx="100584" cy="164592"/>
-          </a:xfrm>
-          <a:prstGeom prst="rightArrow">
-            <a:avLst/>
-          </a:prstGeom>
-          <a:solidFill>
-            <a:srgbClr val="B7791F"/>
-          </a:solidFill>
-          <a:ln>
-            <a:noFill/>
-          </a:ln>
-        </p:spPr>
-        <p:style>
-          <a:lnRef idx="1">
-            <a:schemeClr val="accent1"/>
-          </a:lnRef>
-          <a:fillRef idx="3">
-            <a:schemeClr val="accent1"/>
-          </a:fillRef>
-          <a:effectRef idx="2">
-            <a:schemeClr val="accent1"/>
-          </a:effectRef>
-          <a:fontRef idx="minor">
-            <a:schemeClr val="lt1"/>
-          </a:fontRef>
-        </p:style>
-        <p:txBody>
-          <a:bodyPr rtlCol="0" anchor="ctr"/>
-          <a:lstStyle/>
-          <a:p>
-            <a:pPr algn="ctr"/>
-          </a:p>
-        </p:txBody>
-      </p:sp>
-      <p:sp>
-        <p:nvSpPr>
-          <p:cNvPr id="6" name="Rounded Rectangle 5"/>
-          <p:cNvSpPr/>
-          <p:nvPr/>
-        </p:nvSpPr>
-        <p:spPr>
-          <a:xfrm>
-            <a:off x="2103120" y="1389888"/>
-            <a:ext cx="1298448" cy="530352"/>
-          </a:xfrm>
-          <a:prstGeom prst="roundRect">
-            <a:avLst>
-              <a:gd name="adj" fmla="val 16000"/>
-            </a:avLst>
-          </a:prstGeom>
-          <a:solidFill>
-            <a:srgbClr val="147D73"/>
-          </a:solidFill>
-          <a:ln>
-            <a:noFill/>
-          </a:ln>
-        </p:spPr>
-        <p:style>
-          <a:lnRef idx="1">
-            <a:schemeClr val="accent1"/>
-          </a:lnRef>
-          <a:fillRef idx="3">
-            <a:schemeClr val="accent1"/>
-          </a:fillRef>
-          <a:effectRef idx="2">
-            <a:schemeClr val="accent1"/>
-          </a:effectRef>
-          <a:fontRef idx="minor">
-            <a:schemeClr val="lt1"/>
-          </a:fontRef>
-        </p:style>
-        <p:txBody>
-          <a:bodyPr rtlCol="0" anchor="ctr" wrap="square" lIns="27432" rIns="27432"/>
-          <a:lstStyle/>
-          <a:p>
-            <a:pPr algn="ctr"/>
-            <a:r>
-              <a:rPr sz="1050" b="1">
-                <a:solidFill>
-                  <a:srgbClr val="FFFFFF"/>
-                </a:solidFill>
-                <a:latin typeface="Microsoft YaHei"/>
-              </a:rPr>
-              <a:t>R1 本地基线</a:t>
-            </a:r>
-          </a:p>
-        </p:txBody>
-      </p:sp>
-      <p:sp>
-        <p:nvSpPr>
-          <p:cNvPr id="7" name="Right Arrow 6"/>
-          <p:cNvSpPr/>
-          <p:nvPr/>
-        </p:nvSpPr>
-        <p:spPr>
-          <a:xfrm>
-            <a:off x="3424427" y="1572768"/>
-            <a:ext cx="100584" cy="164592"/>
-          </a:xfrm>
-          <a:prstGeom prst="rightArrow">
-            <a:avLst/>
-          </a:prstGeom>
-          <a:solidFill>
-            <a:srgbClr val="B7791F"/>
-          </a:solidFill>
-          <a:ln>
-            <a:noFill/>
-          </a:ln>
-        </p:spPr>
-        <p:style>
-          <a:lnRef idx="1">
-            <a:schemeClr val="accent1"/>
-          </a:lnRef>
-          <a:fillRef idx="3">
-            <a:schemeClr val="accent1"/>
-          </a:fillRef>
-          <a:effectRef idx="2">
-            <a:schemeClr val="accent1"/>
-          </a:effectRef>
-          <a:fontRef idx="minor">
-            <a:schemeClr val="lt1"/>
-          </a:fontRef>
-        </p:style>
-        <p:txBody>
-          <a:bodyPr rtlCol="0" anchor="ctr"/>
-          <a:lstStyle/>
-          <a:p>
-            <a:pPr algn="ctr"/>
-          </a:p>
-        </p:txBody>
-      </p:sp>
-      <p:sp>
-        <p:nvSpPr>
-          <p:cNvPr id="8" name="Rounded Rectangle 7"/>
-          <p:cNvSpPr/>
-          <p:nvPr/>
-        </p:nvSpPr>
-        <p:spPr>
-          <a:xfrm>
-            <a:off x="3547872" y="1389888"/>
-            <a:ext cx="1298448" cy="530352"/>
-          </a:xfrm>
-          <a:prstGeom prst="roundRect">
-            <a:avLst>
-              <a:gd name="adj" fmla="val 16000"/>
-            </a:avLst>
-          </a:prstGeom>
-          <a:solidFill>
-            <a:srgbClr val="17324D"/>
-          </a:solidFill>
-          <a:ln>
-            <a:noFill/>
-          </a:ln>
-        </p:spPr>
-        <p:style>
-          <a:lnRef idx="1">
-            <a:schemeClr val="accent1"/>
-          </a:lnRef>
-          <a:fillRef idx="3">
-            <a:schemeClr val="accent1"/>
-          </a:fillRef>
-          <a:effectRef idx="2">
-            <a:schemeClr val="accent1"/>
-          </a:effectRef>
-          <a:fontRef idx="minor">
-            <a:schemeClr val="lt1"/>
-          </a:fontRef>
-        </p:style>
-        <p:txBody>
-          <a:bodyPr rtlCol="0" anchor="ctr" wrap="square" lIns="27432" rIns="27432"/>
-          <a:lstStyle/>
-          <a:p>
-            <a:pPr algn="ctr"/>
-            <a:r>
-              <a:rPr sz="1050" b="1">
-                <a:solidFill>
-                  <a:srgbClr val="FFFFFF"/>
-                </a:solidFill>
-                <a:latin typeface="Microsoft YaHei"/>
-              </a:rPr>
-              <a:t>R2 只读证据</a:t>
-            </a:r>
-          </a:p>
-        </p:txBody>
-      </p:sp>
-      <p:sp>
-        <p:nvSpPr>
-          <p:cNvPr id="9" name="Right Arrow 8"/>
-          <p:cNvSpPr/>
-          <p:nvPr/>
-        </p:nvSpPr>
-        <p:spPr>
-          <a:xfrm>
-            <a:off x="4869180" y="1572768"/>
-            <a:ext cx="100584" cy="164592"/>
-          </a:xfrm>
-          <a:prstGeom prst="rightArrow">
-            <a:avLst/>
-          </a:prstGeom>
-          <a:solidFill>
-            <a:srgbClr val="B7791F"/>
-          </a:solidFill>
-          <a:ln>
-            <a:noFill/>
-          </a:ln>
-        </p:spPr>
-        <p:style>
-          <a:lnRef idx="1">
-            <a:schemeClr val="accent1"/>
-          </a:lnRef>
-          <a:fillRef idx="3">
-            <a:schemeClr val="accent1"/>
-          </a:fillRef>
-          <a:effectRef idx="2">
-            <a:schemeClr val="accent1"/>
-          </a:effectRef>
-          <a:fontRef idx="minor">
-            <a:schemeClr val="lt1"/>
-          </a:fontRef>
-        </p:style>
-        <p:txBody>
-          <a:bodyPr rtlCol="0" anchor="ctr"/>
-          <a:lstStyle/>
-          <a:p>
-            <a:pPr algn="ctr"/>
-          </a:p>
-        </p:txBody>
-      </p:sp>
-      <p:sp>
-        <p:nvSpPr>
-          <p:cNvPr id="10" name="Rounded Rectangle 9"/>
-          <p:cNvSpPr/>
-          <p:nvPr/>
-        </p:nvSpPr>
-        <p:spPr>
-          <a:xfrm>
-            <a:off x="4992623" y="1389888"/>
-            <a:ext cx="1298448" cy="530352"/>
-          </a:xfrm>
-          <a:prstGeom prst="roundRect">
-            <a:avLst>
-              <a:gd name="adj" fmla="val 16000"/>
-            </a:avLst>
-          </a:prstGeom>
-          <a:solidFill>
-            <a:srgbClr val="17324D"/>
-          </a:solidFill>
-          <a:ln>
-            <a:noFill/>
-          </a:ln>
-        </p:spPr>
-        <p:style>
-          <a:lnRef idx="1">
-            <a:schemeClr val="accent1"/>
-          </a:lnRef>
-          <a:fillRef idx="3">
-            <a:schemeClr val="accent1"/>
-          </a:fillRef>
-          <a:effectRef idx="2">
-            <a:schemeClr val="accent1"/>
-          </a:effectRef>
-          <a:fontRef idx="minor">
-            <a:schemeClr val="lt1"/>
-          </a:fontRef>
-        </p:style>
-        <p:txBody>
-          <a:bodyPr rtlCol="0" anchor="ctr" wrap="square" lIns="27432" rIns="27432"/>
-          <a:lstStyle/>
-          <a:p>
-            <a:pPr algn="ctr"/>
-            <a:r>
-              <a:rPr sz="1050" b="1">
-                <a:solidFill>
-                  <a:srgbClr val="FFFFFF"/>
-                </a:solidFill>
-                <a:latin typeface="Microsoft YaHei"/>
-              </a:rPr>
-              <a:t>R3 交叉复核</a:t>
-            </a:r>
-          </a:p>
-        </p:txBody>
-      </p:sp>
-      <p:sp>
-        <p:nvSpPr>
-          <p:cNvPr id="11" name="Right Arrow 10"/>
-          <p:cNvSpPr/>
-          <p:nvPr/>
-        </p:nvSpPr>
-        <p:spPr>
-          <a:xfrm>
-            <a:off x="6313931" y="1572768"/>
-            <a:ext cx="100584" cy="164592"/>
-          </a:xfrm>
-          <a:prstGeom prst="rightArrow">
-            <a:avLst/>
-          </a:prstGeom>
-          <a:solidFill>
-            <a:srgbClr val="B7791F"/>
-          </a:solidFill>
-          <a:ln>
-            <a:noFill/>
-          </a:ln>
-        </p:spPr>
-        <p:style>
-          <a:lnRef idx="1">
-            <a:schemeClr val="accent1"/>
-          </a:lnRef>
-          <a:fillRef idx="3">
-            <a:schemeClr val="accent1"/>
-          </a:fillRef>
-          <a:effectRef idx="2">
-            <a:schemeClr val="accent1"/>
-          </a:effectRef>
-          <a:fontRef idx="minor">
-            <a:schemeClr val="lt1"/>
-          </a:fontRef>
-        </p:style>
-        <p:txBody>
-          <a:bodyPr rtlCol="0" anchor="ctr"/>
-          <a:lstStyle/>
-          <a:p>
-            <a:pPr algn="ctr"/>
-          </a:p>
-        </p:txBody>
-      </p:sp>
-      <p:sp>
-        <p:nvSpPr>
-          <p:cNvPr id="12" name="Rounded Rectangle 11"/>
-          <p:cNvSpPr/>
-          <p:nvPr/>
-        </p:nvSpPr>
-        <p:spPr>
-          <a:xfrm>
-            <a:off x="6437375" y="1389888"/>
-            <a:ext cx="1298448" cy="530352"/>
-          </a:xfrm>
-          <a:prstGeom prst="roundRect">
-            <a:avLst>
-              <a:gd name="adj" fmla="val 16000"/>
-            </a:avLst>
-          </a:prstGeom>
-          <a:solidFill>
-            <a:srgbClr val="147D73"/>
-          </a:solidFill>
-          <a:ln>
-            <a:noFill/>
-          </a:ln>
-        </p:spPr>
-        <p:style>
-          <a:lnRef idx="1">
-            <a:schemeClr val="accent1"/>
-          </a:lnRef>
-          <a:fillRef idx="3">
-            <a:schemeClr val="accent1"/>
-          </a:fillRef>
-          <a:effectRef idx="2">
-            <a:schemeClr val="accent1"/>
-          </a:effectRef>
-          <a:fontRef idx="minor">
-            <a:schemeClr val="lt1"/>
-          </a:fontRef>
-        </p:style>
-        <p:txBody>
-          <a:bodyPr rtlCol="0" anchor="ctr" wrap="square" lIns="27432" rIns="27432"/>
-          <a:lstStyle/>
-          <a:p>
-            <a:pPr algn="ctr"/>
-            <a:r>
-              <a:rPr sz="1050" b="1">
-                <a:solidFill>
-                  <a:srgbClr val="FFFFFF"/>
-                </a:solidFill>
-                <a:latin typeface="Microsoft YaHei"/>
-              </a:rPr>
-              <a:t>R4 启动门</a:t>
-            </a:r>
-          </a:p>
-        </p:txBody>
-      </p:sp>
-      <p:sp>
-        <p:nvSpPr>
-          <p:cNvPr id="13" name="Right Arrow 12"/>
-          <p:cNvSpPr/>
-          <p:nvPr/>
-        </p:nvSpPr>
-        <p:spPr>
-          <a:xfrm>
-            <a:off x="7758683" y="1572768"/>
-            <a:ext cx="100584" cy="164592"/>
-          </a:xfrm>
-          <a:prstGeom prst="rightArrow">
-            <a:avLst/>
-          </a:prstGeom>
-          <a:solidFill>
-            <a:srgbClr val="B7791F"/>
-          </a:solidFill>
-          <a:ln>
-            <a:noFill/>
-          </a:ln>
-        </p:spPr>
-        <p:style>
-          <a:lnRef idx="1">
-            <a:schemeClr val="accent1"/>
-          </a:lnRef>
-          <a:fillRef idx="3">
-            <a:schemeClr val="accent1"/>
-          </a:fillRef>
-          <a:effectRef idx="2">
-            <a:schemeClr val="accent1"/>
-          </a:effectRef>
-          <a:fontRef idx="minor">
-            <a:schemeClr val="lt1"/>
-          </a:fontRef>
-        </p:style>
-        <p:txBody>
-          <a:bodyPr rtlCol="0" anchor="ctr"/>
-          <a:lstStyle/>
-          <a:p>
-            <a:pPr algn="ctr"/>
-          </a:p>
-        </p:txBody>
-      </p:sp>
-      <p:sp>
-        <p:nvSpPr>
-          <p:cNvPr id="14" name="Rounded Rectangle 13"/>
-          <p:cNvSpPr/>
-          <p:nvPr/>
-        </p:nvSpPr>
-        <p:spPr>
-          <a:xfrm>
-            <a:off x="7882127" y="1389888"/>
-            <a:ext cx="1298448" cy="530352"/>
-          </a:xfrm>
-          <a:prstGeom prst="roundRect">
-            <a:avLst>
-              <a:gd name="adj" fmla="val 16000"/>
-            </a:avLst>
-          </a:prstGeom>
-          <a:solidFill>
-            <a:srgbClr val="17324D"/>
-          </a:solidFill>
-          <a:ln>
-            <a:noFill/>
-          </a:ln>
-        </p:spPr>
-        <p:style>
-          <a:lnRef idx="1">
-            <a:schemeClr val="accent1"/>
-          </a:lnRef>
-          <a:fillRef idx="3">
-            <a:schemeClr val="accent1"/>
-          </a:fillRef>
-          <a:effectRef idx="2">
-            <a:schemeClr val="accent1"/>
-          </a:effectRef>
-          <a:fontRef idx="minor">
-            <a:schemeClr val="lt1"/>
-          </a:fontRef>
-        </p:style>
-        <p:txBody>
-          <a:bodyPr rtlCol="0" anchor="ctr" wrap="square" lIns="27432" rIns="27432"/>
-          <a:lstStyle/>
-          <a:p>
-            <a:pPr algn="ctr"/>
-            <a:r>
-              <a:rPr sz="1050" b="1">
-                <a:solidFill>
-                  <a:srgbClr val="FFFFFF"/>
-                </a:solidFill>
-                <a:latin typeface="Microsoft YaHei"/>
-              </a:rPr>
-              <a:t>R5 pilot</a:t>
-            </a:r>
-          </a:p>
-        </p:txBody>
-      </p:sp>
-      <p:sp>
-        <p:nvSpPr>
-          <p:cNvPr id="15" name="Right Arrow 14"/>
-          <p:cNvSpPr/>
-          <p:nvPr/>
-        </p:nvSpPr>
-        <p:spPr>
-          <a:xfrm>
-            <a:off x="9203436" y="1572768"/>
-            <a:ext cx="100584" cy="164592"/>
-          </a:xfrm>
-          <a:prstGeom prst="rightArrow">
-            <a:avLst/>
-          </a:prstGeom>
-          <a:solidFill>
-            <a:srgbClr val="B7791F"/>
-          </a:solidFill>
-          <a:ln>
-            <a:noFill/>
-          </a:ln>
-        </p:spPr>
-        <p:style>
-          <a:lnRef idx="1">
-            <a:schemeClr val="accent1"/>
-          </a:lnRef>
-          <a:fillRef idx="3">
-            <a:schemeClr val="accent1"/>
-          </a:fillRef>
-          <a:effectRef idx="2">
-            <a:schemeClr val="accent1"/>
-          </a:effectRef>
-          <a:fontRef idx="minor">
-            <a:schemeClr val="lt1"/>
-          </a:fontRef>
-        </p:style>
-        <p:txBody>
-          <a:bodyPr rtlCol="0" anchor="ctr"/>
-          <a:lstStyle/>
-          <a:p>
-            <a:pPr algn="ctr"/>
-          </a:p>
-        </p:txBody>
-      </p:sp>
-      <p:sp>
-        <p:nvSpPr>
-          <p:cNvPr id="16" name="Rounded Rectangle 15"/>
-          <p:cNvSpPr/>
-          <p:nvPr/>
-        </p:nvSpPr>
-        <p:spPr>
-          <a:xfrm>
-            <a:off x="9326880" y="1389888"/>
-            <a:ext cx="1298448" cy="530352"/>
-          </a:xfrm>
-          <a:prstGeom prst="roundRect">
-            <a:avLst>
-              <a:gd name="adj" fmla="val 16000"/>
-            </a:avLst>
-          </a:prstGeom>
-          <a:solidFill>
-            <a:srgbClr val="147D73"/>
-          </a:solidFill>
-          <a:ln>
-            <a:noFill/>
-          </a:ln>
-        </p:spPr>
-        <p:style>
-          <a:lnRef idx="1">
-            <a:schemeClr val="accent1"/>
-          </a:lnRef>
-          <a:fillRef idx="3">
-            <a:schemeClr val="accent1"/>
-          </a:fillRef>
-          <a:effectRef idx="2">
-            <a:schemeClr val="accent1"/>
-          </a:effectRef>
-          <a:fontRef idx="minor">
-            <a:schemeClr val="lt1"/>
-          </a:fontRef>
-        </p:style>
-        <p:txBody>
-          <a:bodyPr rtlCol="0" anchor="ctr" wrap="square" lIns="27432" rIns="27432"/>
-          <a:lstStyle/>
-          <a:p>
-            <a:pPr algn="ctr"/>
-            <a:r>
-              <a:rPr sz="1050" b="1">
-                <a:solidFill>
-                  <a:srgbClr val="FFFFFF"/>
-                </a:solidFill>
-                <a:latin typeface="Microsoft YaHei"/>
-              </a:rPr>
-              <a:t>R6 正式报告</a:t>
-            </a:r>
-          </a:p>
-        </p:txBody>
-      </p:sp>
-      <p:sp>
-        <p:nvSpPr>
-          <p:cNvPr id="17" name="TextBox 16"/>
-          <p:cNvSpPr txBox="1"/>
-          <p:nvPr/>
-        </p:nvSpPr>
-        <p:spPr>
-          <a:xfrm>
-            <a:off x="749808" y="2148840"/>
-            <a:ext cx="10195560" cy="3035808"/>
-          </a:xfrm>
-          <a:prstGeom prst="rect">
-            <a:avLst/>
-          </a:prstGeom>
-          <a:noFill/>
-        </p:spPr>
-        <p:txBody>
-          <a:bodyPr wrap="square" lIns="36576" rIns="36576">
-            <a:spAutoFit/>
-          </a:bodyPr>
-          <a:lstStyle/>
-          <a:p>
-            <a:pPr>
-              <a:lnSpc>
-                <a:spcPct val="112000"/>
-              </a:lnSpc>
-              <a:spcAft>
-                <a:spcPts val="900"/>
-              </a:spcAft>
-            </a:pPr>
-            <a:r>
-              <a:rPr sz="1500">
-                <a:solidFill>
-                  <a:srgbClr val="1D2731"/>
-                </a:solidFill>
-                <a:latin typeface="Microsoft YaHei"/>
-              </a:rPr>
-              <a:t>R0：2-4 小时，完成认领和证据清单</a:t>
-            </a:r>
-          </a:p>
-          <a:p>
-            <a:pPr>
-              <a:lnSpc>
-                <a:spcPct val="112000"/>
-              </a:lnSpc>
-              <a:spcAft>
-                <a:spcPts val="900"/>
-              </a:spcAft>
-            </a:pPr>
-            <a:r>
-              <a:rPr sz="1500">
-                <a:solidFill>
-                  <a:srgbClr val="1D2731"/>
-                </a:solidFill>
-                <a:latin typeface="Microsoft YaHei"/>
-              </a:rPr>
-              <a:t>R1：24 小时，每人提交 draft PR</a:t>
-            </a:r>
-          </a:p>
-          <a:p>
-            <a:pPr>
-              <a:lnSpc>
-                <a:spcPct val="112000"/>
-              </a:lnSpc>
-              <a:spcAft>
-                <a:spcPts val="900"/>
-              </a:spcAft>
-            </a:pPr>
-            <a:r>
-              <a:rPr sz="1500">
-                <a:solidFill>
-                  <a:srgbClr val="1D2731"/>
-                </a:solidFill>
-                <a:latin typeface="Microsoft YaHei"/>
-              </a:rPr>
-              <a:t>R2：24-36 小时，补 G1/G2 只读证据</a:t>
-            </a:r>
-          </a:p>
-          <a:p>
-            <a:pPr>
-              <a:lnSpc>
-                <a:spcPct val="112000"/>
-              </a:lnSpc>
-              <a:spcAft>
-                <a:spcPts val="900"/>
-              </a:spcAft>
-            </a:pPr>
-            <a:r>
-              <a:rPr sz="1500">
-                <a:solidFill>
-                  <a:srgbClr val="1D2731"/>
-                </a:solidFill>
-                <a:latin typeface="Microsoft YaHei"/>
-              </a:rPr>
-              <a:t>R3/R4：互审、补齐启动门并取得三人批准</a:t>
-            </a:r>
-          </a:p>
-          <a:p>
-            <a:pPr>
-              <a:lnSpc>
-                <a:spcPct val="112000"/>
-              </a:lnSpc>
-              <a:spcAft>
-                <a:spcPts val="900"/>
-              </a:spcAft>
-            </a:pPr>
-            <a:r>
-              <a:rPr sz="1500">
-                <a:solidFill>
-                  <a:srgbClr val="1D2731"/>
-                </a:solidFill>
-                <a:latin typeface="Microsoft YaHei"/>
-              </a:rPr>
-              <a:t>R5：单次 25 分钟硬停止；R6：正式场景与 Word 报告</a:t>
-            </a:r>
-          </a:p>
-        </p:txBody>
-      </p:sp>
-      <p:sp>
-        <p:nvSpPr>
-          <p:cNvPr id="18" name="TextBox 17"/>
+        </p:nvGraphicFramePr>
+        <p:xfrm>
+          <a:off x="685800" y="1353312"/>
+          <a:ext cx="9966959" cy="2706624"/>
+        </p:xfrm>
+        <a:graphic>
+          <a:graphicData uri="http://schemas.openxmlformats.org/drawingml/2006/table">
+            <a:tbl>
+              <a:tblPr firstRow="1" bandRow="1">
+                <a:tableStyleId>{5C22544A-7EE6-4342-B048-85BDC9FD1C3A}</a:tableStyleId>
+              </a:tblPr>
+              <a:tblGrid>
+                <a:gridCol w="1600200"/>
+                <a:gridCol w="3977639"/>
+                <a:gridCol w="4389120"/>
+              </a:tblGrid>
+              <a:tr h="438912">
+                <a:tc>
+                  <a:txBody>
+                    <a:bodyPr wrap="square"/>
+                    <a:lstStyle/>
+                    <a:p>
+                      <a:r>
+                        <a:rPr sz="1200" b="1">
+                          <a:solidFill>
+                            <a:srgbClr val="FFFFFF"/>
+                          </a:solidFill>
+                          <a:latin typeface="Microsoft YaHei"/>
+                        </a:rPr>
+                        <a:t>看什么</a:t>
+                      </a:r>
+                    </a:p>
+                  </a:txBody>
+                  <a:tcPr marL="64008" marR="64008" marT="27432" marB="27432" anchor="ctr">
+                    <a:solidFill>
+                      <a:srgbClr val="17324D"/>
+                    </a:solidFill>
+                  </a:tcPr>
+                </a:tc>
+                <a:tc>
+                  <a:txBody>
+                    <a:bodyPr wrap="square"/>
+                    <a:lstStyle/>
+                    <a:p>
+                      <a:r>
+                        <a:rPr sz="1200" b="1">
+                          <a:solidFill>
+                            <a:srgbClr val="FFFFFF"/>
+                          </a:solidFill>
+                          <a:latin typeface="Microsoft YaHei"/>
+                        </a:rPr>
+                        <a:t>指标</a:t>
+                      </a:r>
+                    </a:p>
+                  </a:txBody>
+                  <a:tcPr marL="64008" marR="64008" marT="27432" marB="27432" anchor="ctr">
+                    <a:solidFill>
+                      <a:srgbClr val="17324D"/>
+                    </a:solidFill>
+                  </a:tcPr>
+                </a:tc>
+                <a:tc>
+                  <a:txBody>
+                    <a:bodyPr wrap="square"/>
+                    <a:lstStyle/>
+                    <a:p>
+                      <a:r>
+                        <a:rPr sz="1200" b="1">
+                          <a:solidFill>
+                            <a:srgbClr val="FFFFFF"/>
+                          </a:solidFill>
+                          <a:latin typeface="Microsoft YaHei"/>
+                        </a:rPr>
+                        <a:t>一句话解释</a:t>
+                      </a:r>
+                    </a:p>
+                  </a:txBody>
+                  <a:tcPr marL="64008" marR="64008" marT="27432" marB="27432" anchor="ctr">
+                    <a:solidFill>
+                      <a:srgbClr val="17324D"/>
+                    </a:solidFill>
+                  </a:tcPr>
+                </a:tc>
+              </a:tr>
+              <a:tr h="566928">
+                <a:tc>
+                  <a:txBody>
+                    <a:bodyPr wrap="square"/>
+                    <a:lstStyle/>
+                    <a:p>
+                      <a:r>
+                        <a:rPr sz="1100" b="0">
+                          <a:solidFill>
+                            <a:srgbClr val="1D2731"/>
+                          </a:solidFill>
+                          <a:latin typeface="Microsoft YaHei"/>
+                        </a:rPr>
+                        <a:t>标签猜得准不准</a:t>
+                      </a:r>
+                    </a:p>
+                  </a:txBody>
+                  <a:tcPr marL="64008" marR="64008" marT="27432" marB="27432" anchor="ctr">
+                    <a:solidFill>
+                      <a:srgbClr val="FFFFFF"/>
+                    </a:solidFill>
+                  </a:tcPr>
+                </a:tc>
+                <a:tc>
+                  <a:txBody>
+                    <a:bodyPr wrap="square"/>
+                    <a:lstStyle/>
+                    <a:p>
+                      <a:r>
+                        <a:rPr sz="1100" b="0">
+                          <a:solidFill>
+                            <a:srgbClr val="1D2731"/>
+                          </a:solidFill>
+                          <a:latin typeface="Microsoft YaHei"/>
+                        </a:rPr>
+                        <a:t>macro-F1</a:t>
+                      </a:r>
+                    </a:p>
+                  </a:txBody>
+                  <a:tcPr marL="64008" marR="64008" marT="27432" marB="27432" anchor="ctr">
+                    <a:solidFill>
+                      <a:srgbClr val="FFFFFF"/>
+                    </a:solidFill>
+                  </a:tcPr>
+                </a:tc>
+                <a:tc>
+                  <a:txBody>
+                    <a:bodyPr wrap="square"/>
+                    <a:lstStyle/>
+                    <a:p>
+                      <a:r>
+                        <a:rPr sz="1100" b="0">
+                          <a:solidFill>
+                            <a:srgbClr val="1D2731"/>
+                          </a:solidFill>
+                          <a:latin typeface="Microsoft YaHei"/>
+                        </a:rPr>
+                        <a:t>被留出物种的细胞类型被猜对的程度</a:t>
+                      </a:r>
+                    </a:p>
+                  </a:txBody>
+                  <a:tcPr marL="64008" marR="64008" marT="27432" marB="27432" anchor="ctr">
+                    <a:solidFill>
+                      <a:srgbClr val="FFFFFF"/>
+                    </a:solidFill>
+                  </a:tcPr>
+                </a:tc>
+              </a:tr>
+              <a:tr h="566928">
+                <a:tc>
+                  <a:txBody>
+                    <a:bodyPr wrap="square"/>
+                    <a:lstStyle/>
+                    <a:p>
+                      <a:r>
+                        <a:rPr sz="1100" b="0">
+                          <a:solidFill>
+                            <a:srgbClr val="1D2731"/>
+                          </a:solidFill>
+                          <a:latin typeface="Microsoft YaHei"/>
+                        </a:rPr>
+                        <a:t>物种混得匀不匀</a:t>
+                      </a:r>
+                    </a:p>
+                  </a:txBody>
+                  <a:tcPr marL="64008" marR="64008" marT="27432" marB="27432" anchor="ctr">
+                    <a:solidFill>
+                      <a:srgbClr val="F2F6F8"/>
+                    </a:solidFill>
+                  </a:tcPr>
+                </a:tc>
+                <a:tc>
+                  <a:txBody>
+                    <a:bodyPr wrap="square"/>
+                    <a:lstStyle/>
+                    <a:p>
+                      <a:r>
+                        <a:rPr sz="1100" b="0">
+                          <a:solidFill>
+                            <a:srgbClr val="1D2731"/>
+                          </a:solidFill>
+                          <a:latin typeface="Microsoft YaHei"/>
+                        </a:rPr>
+                        <a:t>kBET、iLISI</a:t>
+                      </a:r>
+                    </a:p>
+                  </a:txBody>
+                  <a:tcPr marL="64008" marR="64008" marT="27432" marB="27432" anchor="ctr">
+                    <a:solidFill>
+                      <a:srgbClr val="F2F6F8"/>
+                    </a:solidFill>
+                  </a:tcPr>
+                </a:tc>
+                <a:tc>
+                  <a:txBody>
+                    <a:bodyPr wrap="square"/>
+                    <a:lstStyle/>
+                    <a:p>
+                      <a:r>
+                        <a:rPr sz="1100" b="0">
+                          <a:solidFill>
+                            <a:srgbClr val="1D2731"/>
+                          </a:solidFill>
+                          <a:latin typeface="Microsoft YaHei"/>
+                        </a:rPr>
+                        <a:t>整合之后不同物种的细胞是否混在一起</a:t>
+                      </a:r>
+                    </a:p>
+                  </a:txBody>
+                  <a:tcPr marL="64008" marR="64008" marT="27432" marB="27432" anchor="ctr">
+                    <a:solidFill>
+                      <a:srgbClr val="F2F6F8"/>
+                    </a:solidFill>
+                  </a:tcPr>
+                </a:tc>
+              </a:tr>
+              <a:tr h="566928">
+                <a:tc>
+                  <a:txBody>
+                    <a:bodyPr wrap="square"/>
+                    <a:lstStyle/>
+                    <a:p>
+                      <a:r>
+                        <a:rPr sz="1100" b="0">
+                          <a:solidFill>
+                            <a:srgbClr val="1D2731"/>
+                          </a:solidFill>
+                          <a:latin typeface="Microsoft YaHei"/>
+                        </a:rPr>
+                        <a:t>类型结构保得好不好</a:t>
+                      </a:r>
+                    </a:p>
+                  </a:txBody>
+                  <a:tcPr marL="64008" marR="64008" marT="27432" marB="27432" anchor="ctr">
+                    <a:solidFill>
+                      <a:srgbClr val="FFFFFF"/>
+                    </a:solidFill>
+                  </a:tcPr>
+                </a:tc>
+                <a:tc>
+                  <a:txBody>
+                    <a:bodyPr wrap="square"/>
+                    <a:lstStyle/>
+                    <a:p>
+                      <a:r>
+                        <a:rPr sz="1100" b="0">
+                          <a:solidFill>
+                            <a:srgbClr val="1D2731"/>
+                          </a:solidFill>
+                          <a:latin typeface="Microsoft YaHei"/>
+                        </a:rPr>
+                        <a:t>silhouette</a:t>
+                      </a:r>
+                    </a:p>
+                  </a:txBody>
+                  <a:tcPr marL="64008" marR="64008" marT="27432" marB="27432" anchor="ctr">
+                    <a:solidFill>
+                      <a:srgbClr val="FFFFFF"/>
+                    </a:solidFill>
+                  </a:tcPr>
+                </a:tc>
+                <a:tc>
+                  <a:txBody>
+                    <a:bodyPr wrap="square"/>
+                    <a:lstStyle/>
+                    <a:p>
+                      <a:r>
+                        <a:rPr sz="1100" b="0">
+                          <a:solidFill>
+                            <a:srgbClr val="1D2731"/>
+                          </a:solidFill>
+                          <a:latin typeface="Microsoft YaHei"/>
+                        </a:rPr>
+                        <a:t>整合时细胞类型之间的界限有没有被抹掉</a:t>
+                      </a:r>
+                    </a:p>
+                  </a:txBody>
+                  <a:tcPr marL="64008" marR="64008" marT="27432" marB="27432" anchor="ctr">
+                    <a:solidFill>
+                      <a:srgbClr val="FFFFFF"/>
+                    </a:solidFill>
+                  </a:tcPr>
+                </a:tc>
+              </a:tr>
+              <a:tr h="566928">
+                <a:tc>
+                  <a:txBody>
+                    <a:bodyPr wrap="square"/>
+                    <a:lstStyle/>
+                    <a:p>
+                      <a:r>
+                        <a:rPr sz="1100" b="0">
+                          <a:solidFill>
+                            <a:srgbClr val="1D2731"/>
+                          </a:solidFill>
+                          <a:latin typeface="Microsoft YaHei"/>
+                        </a:rPr>
+                        <a:t>跑得快不快、贵不贵</a:t>
+                      </a:r>
+                    </a:p>
+                  </a:txBody>
+                  <a:tcPr marL="64008" marR="64008" marT="27432" marB="27432" anchor="ctr">
+                    <a:solidFill>
+                      <a:srgbClr val="F2F6F8"/>
+                    </a:solidFill>
+                  </a:tcPr>
+                </a:tc>
+                <a:tc>
+                  <a:txBody>
+                    <a:bodyPr wrap="square"/>
+                    <a:lstStyle/>
+                    <a:p>
+                      <a:r>
+                        <a:rPr sz="1100" b="0">
+                          <a:solidFill>
+                            <a:srgbClr val="1D2731"/>
+                          </a:solidFill>
+                          <a:latin typeface="Microsoft YaHei"/>
+                        </a:rPr>
+                        <a:t>时间、内存、费用</a:t>
+                      </a:r>
+                    </a:p>
+                  </a:txBody>
+                  <a:tcPr marL="64008" marR="64008" marT="27432" marB="27432" anchor="ctr">
+                    <a:solidFill>
+                      <a:srgbClr val="F2F6F8"/>
+                    </a:solidFill>
+                  </a:tcPr>
+                </a:tc>
+                <a:tc>
+                  <a:txBody>
+                    <a:bodyPr wrap="square"/>
+                    <a:lstStyle/>
+                    <a:p>
+                      <a:r>
+                        <a:rPr sz="1100" b="0">
+                          <a:solidFill>
+                            <a:srgbClr val="1D2731"/>
+                          </a:solidFill>
+                          <a:latin typeface="Microsoft YaHei"/>
+                        </a:rPr>
+                        <a:t>每次运行的时间和花费都记账</a:t>
+                      </a:r>
+                    </a:p>
+                  </a:txBody>
+                  <a:tcPr marL="64008" marR="64008" marT="27432" marB="27432" anchor="ctr">
+                    <a:solidFill>
+                      <a:srgbClr val="F2F6F8"/>
+                    </a:solidFill>
+                  </a:tcPr>
+                </a:tc>
+              </a:tr>
+            </a:tbl>
+          </a:graphicData>
+        </a:graphic>
+      </p:graphicFrame>
+      <p:sp>
+        <p:nvSpPr>
+          <p:cNvPr id="5" name="TextBox 4"/>
           <p:cNvSpPr txBox="1"/>
           <p:nvPr/>
         </p:nvSpPr>
@@ -10115,7 +9770,7 @@
       </p:sp>
       <p:sp>
         <p:nvSpPr>
-          <p:cNvPr id="19" name="TextBox 18"/>
+          <p:cNvPr id="6" name="TextBox 5"/>
           <p:cNvSpPr txBox="1"/>
           <p:nvPr/>
         </p:nvSpPr>
@@ -10253,21 +9908,64 @@
                 </a:solidFill>
                 <a:latin typeface="Microsoft YaHei"/>
               </a:rPr>
-              <a:t>接手操作卡</a:t>
-            </a:r>
-          </a:p>
-        </p:txBody>
-      </p:sp>
-      <p:sp>
-        <p:nvSpPr>
-          <p:cNvPr id="4" name="TextBox 3"/>
+              <a:t>下一步计划（按检查点推进，不卡死时间）</a:t>
+            </a:r>
+          </a:p>
+        </p:txBody>
+      </p:sp>
+      <p:sp>
+        <p:nvSpPr>
+          <p:cNvPr id="4" name="Rectangle 3"/>
+          <p:cNvSpPr/>
+          <p:nvPr/>
+        </p:nvSpPr>
+        <p:spPr>
+          <a:xfrm>
+            <a:off x="0" y="5193792"/>
+            <a:ext cx="12191695" cy="914400"/>
+          </a:xfrm>
+          <a:prstGeom prst="rect">
+            <a:avLst/>
+          </a:prstGeom>
+          <a:solidFill>
+            <a:srgbClr val="F2F6F8"/>
+          </a:solidFill>
+          <a:ln>
+            <a:noFill/>
+          </a:ln>
+        </p:spPr>
+        <p:style>
+          <a:lnRef idx="1">
+            <a:schemeClr val="accent1"/>
+          </a:lnRef>
+          <a:fillRef idx="3">
+            <a:schemeClr val="accent1"/>
+          </a:fillRef>
+          <a:effectRef idx="2">
+            <a:schemeClr val="accent1"/>
+          </a:effectRef>
+          <a:fontRef idx="minor">
+            <a:schemeClr val="lt1"/>
+          </a:fontRef>
+        </p:style>
+        <p:txBody>
+          <a:bodyPr rtlCol="0" anchor="ctr"/>
+          <a:lstStyle/>
+          <a:p>
+            <a:pPr algn="ctr"/>
+          </a:p>
+        </p:txBody>
+      </p:sp>
+      <p:sp>
+        <p:nvSpPr>
+          <p:cNvPr id="5" name="TextBox 4"/>
           <p:cNvSpPr txBox="1"/>
           <p:nvPr/>
         </p:nvSpPr>
         <p:spPr>
           <a:xfrm>
-            <a:off x="749808" y="1353312"/>
-            <a:ext cx="10195560" cy="4096511"/>
+            <a:off x="749808" y="5321808"/>
+            <a:ext cx="10698480" cy="658368"/>
           </a:xfrm>
           <a:prstGeom prst="rect">
             <a:avLst/>
@@ -10275,6 +9973,40 @@
           <a:noFill/>
         </p:spPr>
         <p:txBody>
+          <a:bodyPr wrap="square">
+            <a:spAutoFit/>
+          </a:bodyPr>
+          <a:lstStyle/>
+          <a:p>
+            <a:r>
+              <a:rPr sz="1500" b="1">
+                <a:solidFill>
+                  <a:srgbClr val="17324D"/>
+                </a:solidFill>
+                <a:latin typeface="Microsoft YaHei"/>
+              </a:rPr>
+              <a:t>要点：三步走，每步全组过目；上一步不通过，就不进入下一步。</a:t>
+            </a:r>
+          </a:p>
+        </p:txBody>
+      </p:sp>
+      <p:sp>
+        <p:nvSpPr>
+          <p:cNvPr id="6" name="TextBox 5"/>
+          <p:cNvSpPr txBox="1"/>
+          <p:nvPr/>
+        </p:nvSpPr>
+        <p:spPr>
+          <a:xfrm>
+            <a:off x="749808" y="1600200"/>
+            <a:ext cx="10195560" cy="3017520"/>
+          </a:xfrm>
+          <a:prstGeom prst="rect">
+            <a:avLst/>
+          </a:prstGeom>
+          <a:noFill/>
+        </p:spPr>
+        <p:txBody>
           <a:bodyPr wrap="square" lIns="36576" rIns="36576">
             <a:spAutoFit/>
           </a:bodyPr>
@@ -10282,10 +10014,10 @@
           <a:p>
             <a:pPr>
               <a:lnSpc>
-                <a:spcPct val="112000"/>
+                <a:spcPct val="128000"/>
               </a:lnSpc>
               <a:spcAft>
-                <a:spcPts val="900"/>
+                <a:spcPts val="1500"/>
               </a:spcAft>
             </a:pPr>
             <a:r>
@@ -10295,16 +10027,16 @@
                 </a:solidFill>
                 <a:latin typeface="Microsoft YaHei"/>
               </a:rPr>
-              <a:t>1. clone 仓库，从 main 创建短分支</a:t>
+              <a:t>第一步（现在）：等老师提供课程数据入口，然后核对数据能读、字段齐全，核对软件环境——这些都不花钱</a:t>
             </a:r>
           </a:p>
           <a:p>
             <a:pPr>
               <a:lnSpc>
-                <a:spcPct val="112000"/>
+                <a:spcPct val="128000"/>
               </a:lnSpc>
               <a:spcAft>
-                <a:spcPts val="900"/>
+                <a:spcPts val="1500"/>
               </a:spcAft>
             </a:pPr>
             <a:r>
@@ -10314,109 +10046,52 @@
                 </a:solidFill>
                 <a:latin typeface="Microsoft YaHei"/>
               </a:rPr>
-              <a:t>2. pip install -r requirements.txt</a:t>
+              <a:t>第二步（全组同意后）：小规模试跑一次，设好保险丝——单卡、限时到点即停、单次花费 10 元封顶</a:t>
             </a:r>
           </a:p>
           <a:p>
             <a:pPr>
               <a:lnSpc>
-                <a:spcPct val="112000"/>
+                <a:spcPct val="128000"/>
               </a:lnSpc>
               <a:spcAft>
-                <a:spcPts val="900"/>
+                <a:spcPts val="1500"/>
               </a:spcAft>
             </a:pPr>
             <a:r>
-              <a:rPr sz="1500">
+              <a:rPr sz="1700">
                 <a:solidFill>
                   <a:srgbClr val="1D2731"/>
                 </a:solidFill>
                 <a:latin typeface="Microsoft YaHei"/>
               </a:rPr>
-              <a:t>3. unittest discover -s tests -v</a:t>
+              <a:t>第三步（试跑顺利后）：正式实验、统一评分、写 Word 报告</a:t>
             </a:r>
           </a:p>
           <a:p>
             <a:pPr>
               <a:lnSpc>
-                <a:spcPct val="112000"/>
+                <a:spcPct val="128000"/>
               </a:lnSpc>
               <a:spcAft>
-                <a:spcPts val="900"/>
+                <a:spcPts val="1500"/>
               </a:spcAft>
             </a:pPr>
             <a:r>
-              <a:rPr sz="1500">
+              <a:rPr sz="1700">
                 <a:solidFill>
                   <a:srgbClr val="1D2731"/>
                 </a:solidFill>
                 <a:latin typeface="Microsoft YaHei"/>
               </a:rPr>
-              <a:t>4. smoke_test.py --outdir smoke-output</a:t>
-            </a:r>
-          </a:p>
-          <a:p>
-            <a:pPr>
-              <a:lnSpc>
-                <a:spcPct val="112000"/>
-              </a:lnSpc>
-              <a:spcAft>
-                <a:spcPts val="900"/>
-              </a:spcAft>
-            </a:pPr>
-            <a:r>
-              <a:rPr sz="1400">
-                <a:solidFill>
-                  <a:srgbClr val="1D2731"/>
-                </a:solidFill>
-                <a:latin typeface="Microsoft YaHei"/>
-              </a:rPr>
-              <a:t>5. plan_contract.py / budget_check.py --profile 4090x1</a:t>
-            </a:r>
-          </a:p>
-          <a:p>
-            <a:pPr>
-              <a:lnSpc>
-                <a:spcPct val="112000"/>
-              </a:lnSpc>
-              <a:spcAft>
-                <a:spcPts val="900"/>
-              </a:spcAft>
-            </a:pPr>
-            <a:r>
-              <a:rPr sz="1500">
-                <a:solidFill>
-                  <a:srgbClr val="1D2731"/>
-                </a:solidFill>
-                <a:latin typeface="Microsoft YaHei"/>
-              </a:rPr>
-              <a:t>6. startup_preflight.py：证据未齐时退出码 2 是安全阻塞</a:t>
-            </a:r>
-          </a:p>
-          <a:p>
-            <a:pPr>
-              <a:lnSpc>
-                <a:spcPct val="112000"/>
-              </a:lnSpc>
-              <a:spcAft>
-                <a:spcPts val="900"/>
-              </a:spcAft>
-            </a:pPr>
-            <a:r>
-              <a:rPr sz="1500">
-                <a:solidFill>
-                  <a:srgbClr val="1D2731"/>
-                </a:solidFill>
-                <a:latin typeface="Microsoft YaHei"/>
-              </a:rPr>
-              <a:t>7. A 查数据字段；B 查镜像版本；C 维护指标和 artifact 契约</a:t>
-            </a:r>
-          </a:p>
-        </p:txBody>
-      </p:sp>
-      <p:sp>
-        <p:nvSpPr>
-          <p:cNvPr id="5" name="TextBox 4"/>
+              <a:t>每一步完成都全组过目；任何一步不通过，就不进入下一步</a:t>
+            </a:r>
+          </a:p>
+        </p:txBody>
+      </p:sp>
+      <p:sp>
+        <p:nvSpPr>
+          <p:cNvPr id="7" name="TextBox 6"/>
           <p:cNvSpPr txBox="1"/>
           <p:nvPr/>
         </p:nvSpPr>
@@ -10454,7 +10129,7 @@
       </p:sp>
       <p:sp>
         <p:nvSpPr>
-          <p:cNvPr id="6" name="TextBox 5"/>
+          <p:cNvPr id="8" name="TextBox 7"/>
           <p:cNvSpPr txBox="1"/>
           <p:nvPr/>
         </p:nvSpPr>
